--- a/slides/Churn_Prediction_Group_Template.pptx
+++ b/slides/Churn_Prediction_Group_Template.pptx
@@ -40,6 +40,13 @@
     <p:sldId id="298" r:id="rId33"/>
     <p:sldId id="299" r:id="rId34"/>
     <p:sldId id="300" r:id="rId35"/>
+    <p:sldId id="306" r:id="rId47"/>
+    <p:sldId id="307" r:id="rId48"/>
+    <p:sldId id="308" r:id="rId49"/>
+    <p:sldId id="309" r:id="rId50"/>
+    <p:sldId id="310" r:id="rId51"/>
+    <p:sldId id="311" r:id="rId52"/>
+    <p:sldId id="312" r:id="rId53"/>
     <p:sldId id="295" r:id="rId36"/>
     <p:sldId id="296" r:id="rId37"/>
     <p:sldId id="297" r:id="rId38"/>
@@ -1160,6 +1167,281 @@
                 </c:pt>
                 <c:pt idx="3">
                   <c:v>0.91</c:v>
+                </c:pt>
+              </c:numCache>
+            </c:numRef>
+          </c:val>
+        </c:ser>
+        <c:dLbls>
+          <c:showLegendKey val="0"/>
+          <c:showVal val="1"/>
+          <c:showCatName val="0"/>
+          <c:showSerName val="0"/>
+          <c:showPercent val="0"/>
+          <c:showBubbleSize val="0"/>
+        </c:dLbls>
+        <c:gapWidth val="150"/>
+        <c:axId val="2094734554"/>
+        <c:axId val="2094734552"/>
+      </c:barChart>
+      <c:catAx>
+        <c:axId val="2094734554"/>
+        <c:scaling>
+          <c:orientation val="minMax"/>
+        </c:scaling>
+        <c:delete val="0"/>
+        <c:axPos val="b"/>
+        <c:numFmt formatCode="General" sourceLinked="1"/>
+        <c:majorTickMark val="out"/>
+        <c:minorTickMark val="none"/>
+        <c:tickLblPos val="low"/>
+        <c:spPr>
+          <a:ln w="12700" cap="flat" cmpd="sng" algn="ctr">
+            <a:solidFill>
+              <a:srgbClr val="888888"/>
+            </a:solidFill>
+            <a:prstDash val="solid"/>
+            <a:round/>
+          </a:ln>
+        </c:spPr>
+        <c:txPr>
+          <a:bodyPr rot="-60000000" spcFirstLastPara="0" vertOverflow="ellipsis" vert="horz" wrap="square" anchor="ctr" anchorCtr="1"/>
+          <a:lstStyle/>
+          <a:p>
+            <a:pPr>
+              <a:defRPr lang="zh-CN" sz="1200" b="0" i="0" u="none" strike="noStrike" kern="1200" baseline="0">
+                <a:solidFill>
+                  <a:srgbClr val="64748B"/>
+                </a:solidFill>
+                <a:latin typeface="Arial" panose="020B0604020202090204"/>
+                <a:ea typeface="+mn-ea"/>
+                <a:cs typeface="+mn-cs"/>
+              </a:defRPr>
+            </a:pPr>
+          </a:p>
+        </c:txPr>
+        <c:crossAx val="2094734552"/>
+        <c:crosses val="autoZero"/>
+        <c:auto val="1"/>
+        <c:lblAlgn val="ctr"/>
+        <c:lblOffset val="100"/>
+        <c:noMultiLvlLbl val="1"/>
+      </c:catAx>
+      <c:valAx>
+        <c:axId val="2094734552"/>
+        <c:scaling>
+          <c:orientation val="minMax"/>
+          <c:max val="1"/>
+          <c:min val="0.7"/>
+        </c:scaling>
+        <c:delete val="0"/>
+        <c:axPos val="l"/>
+        <c:majorGridlines>
+          <c:spPr>
+            <a:ln w="6350" cap="flat" cmpd="sng" algn="ctr">
+              <a:solidFill>
+                <a:srgbClr val="E2E8F0"/>
+              </a:solidFill>
+              <a:prstDash val="solid"/>
+              <a:round/>
+            </a:ln>
+          </c:spPr>
+        </c:majorGridlines>
+        <c:numFmt formatCode="General" sourceLinked="0"/>
+        <c:majorTickMark val="out"/>
+        <c:minorTickMark val="none"/>
+        <c:tickLblPos val="nextTo"/>
+        <c:spPr>
+          <a:ln w="12700" cap="flat" cmpd="sng" algn="ctr">
+            <a:solidFill>
+              <a:srgbClr val="888888"/>
+            </a:solidFill>
+            <a:prstDash val="solid"/>
+            <a:round/>
+          </a:ln>
+        </c:spPr>
+        <c:txPr>
+          <a:bodyPr rot="-60000000" spcFirstLastPara="0" vertOverflow="ellipsis" vert="horz" wrap="square" anchor="ctr" anchorCtr="1"/>
+          <a:lstStyle/>
+          <a:p>
+            <a:pPr>
+              <a:defRPr lang="zh-CN" sz="1200" b="0" i="0" u="none" strike="noStrike" kern="1200" baseline="0">
+                <a:solidFill>
+                  <a:srgbClr val="64748B"/>
+                </a:solidFill>
+                <a:latin typeface="Arial" panose="020B0604020202090204"/>
+                <a:ea typeface="+mn-ea"/>
+                <a:cs typeface="+mn-cs"/>
+              </a:defRPr>
+            </a:pPr>
+          </a:p>
+        </c:txPr>
+        <c:crossAx val="2094734554"/>
+        <c:crosses val="autoZero"/>
+        <c:crossBetween val="between"/>
+      </c:valAx>
+      <c:spPr>
+        <a:noFill/>
+        <a:ln>
+          <a:noFill/>
+        </a:ln>
+        <a:effectLst/>
+      </c:spPr>
+    </c:plotArea>
+    <c:plotVisOnly val="1"/>
+    <c:dispBlanksAs val="span"/>
+    <c:showDLblsOverMax val="1"/>
+  </c:chart>
+  <c:spPr>
+    <a:solidFill>
+      <a:srgbClr val="FFFFFF"/>
+    </a:solidFill>
+    <a:ln>
+      <a:noFill/>
+    </a:ln>
+    <a:effectLst/>
+  </c:spPr>
+  <c:txPr>
+    <a:bodyPr/>
+    <a:lstStyle/>
+    <a:p>
+      <a:pPr>
+        <a:defRPr lang="zh-CN"/>
+      </a:pPr>
+    </a:p>
+  </c:txPr>
+  <c:externalData r:id="rId1">
+    <c:autoUpdate val="0"/>
+  </c:externalData>
+</c:chartSpace>
+</file>
+
+<file path=ppt/charts/chart5.xml><?xml version="1.0" encoding="utf-8"?>
+<c:chartSpace xmlns:c="http://schemas.openxmlformats.org/drawingml/2006/chart" xmlns:a="http://schemas.openxmlformats.org/drawingml/2006/main" xmlns:r="http://schemas.openxmlformats.org/officeDocument/2006/relationships">
+  <c:date1904 val="0"/>
+  <c:lang val="zh-CN"/>
+  <c:roundedCorners val="1"/>
+  <mc:AlternateContent xmlns:mc="http://schemas.openxmlformats.org/markup-compatibility/2006">
+    <mc:Choice xmlns:c14="http://schemas.microsoft.com/office/drawing/2007/8/2/chart" Requires="c14">
+      <c14:style val="102"/>
+    </mc:Choice>
+    <mc:Fallback>
+      <c:style val="2"/>
+    </mc:Fallback>
+  </mc:AlternateContent>
+  <c:chart>
+    <c:autoTitleDeleted val="1"/>
+    <c:plotArea>
+      <c:layout/>
+      <c:barChart>
+        <c:barDir val="col"/>
+        <c:grouping val="clustered"/>
+        <c:varyColors val="0"/>
+        <c:ser>
+          <c:idx val="0"/>
+          <c:order val="0"/>
+          <c:tx>
+            <c:strRef>
+              <c:f>Sheet1!$B$1</c:f>
+              <c:strCache>
+                <c:ptCount val="1"/>
+                <c:pt idx="0">
+                  <c:v>Score</c:v>
+                </c:pt>
+              </c:strCache>
+            </c:strRef>
+          </c:tx>
+          <c:spPr>
+            <a:solidFill>
+              <a:srgbClr val="F97316"/>
+            </a:solidFill>
+            <a:effectLst/>
+          </c:spPr>
+          <c:invertIfNegative val="0"/>
+          <c:dPt>
+            <c:idx val="0"/>
+            <c:invertIfNegative val="0"/>
+            <c:bubble3D val="0"/>
+            <c:spPr>
+              <a:solidFill>
+                <a:srgbClr val="002060"/>
+              </a:solidFill>
+              <a:effectLst/>
+            </c:spPr>
+          </c:dPt>
+          <c:dPt>
+            <c:idx val="1"/>
+            <c:invertIfNegative val="0"/>
+            <c:bubble3D val="0"/>
+            <c:spPr>
+              <a:solidFill>
+                <a:srgbClr val="002060"/>
+              </a:solidFill>
+              <a:effectLst/>
+            </c:spPr>
+          </c:dPt>
+          <c:dPt>
+            <c:idx val="2"/>
+            <c:invertIfNegative val="0"/>
+            <c:bubble3D val="0"/>
+            <c:spPr>
+              <a:solidFill>
+                <a:srgbClr val="002060"/>
+              </a:solidFill>
+              <a:effectLst/>
+            </c:spPr>
+          </c:dPt>
+          <c:dPt>
+            <c:idx val="3"/>
+            <c:invertIfNegative val="0"/>
+            <c:bubble3D val="0"/>
+            <c:spPr>
+              <a:solidFill>
+                <a:srgbClr val="002060"/>
+              </a:solidFill>
+              <a:effectLst/>
+            </c:spPr>
+          </c:dPt>
+          <c:dLbls>
+            <c:delete val="1"/>
+          </c:dLbls>
+          <c:cat>
+            <c:strRef>
+              <c:f>Sheet1!$A$2:$A$5</c:f>
+              <c:strCache>
+                <c:ptCount val="4"/>
+                <c:pt idx="0">
+                  <c:v>Accuracy</c:v>
+                </c:pt>
+                <c:pt idx="1">
+                  <c:v>Recall</c:v>
+                </c:pt>
+                <c:pt idx="2">
+                  <c:v>Precision</c:v>
+                </c:pt>
+                <c:pt idx="3">
+                  <c:v>F1</c:v>
+                </c:pt>
+              </c:strCache>
+            </c:strRef>
+          </c:cat>
+          <c:val>
+            <c:numRef>
+              <c:f>Sheet1!$B$2:$B$5</c:f>
+              <c:numCache>
+                <c:formatCode>General</c:formatCode>
+                <c:ptCount val="4"/>
+                <c:pt idx="0">
+                  <c:v>0.931</c:v>
+                </c:pt>
+                <c:pt idx="1">
+                  <c:v>0.72</c:v>
+                </c:pt>
+                <c:pt idx="2">
+                  <c:v>0.68</c:v>
+                </c:pt>
+                <c:pt idx="3">
+                  <c:v>0.69</c:v>
                 </c:pt>
               </c:numCache>
             </c:numRef>
@@ -20016,7 +20298,7 @@
                 <a:ea typeface="Consolas" pitchFamily="34" charset="-122"/>
                 <a:cs typeface="Consolas" pitchFamily="34" charset="-120"/>
               </a:rPr>
-              <a:t>               prefix='area', drop_first=True)</a:t>
+              <a:t xml:space="preserve">               prefix='area', drop_first=True)</a:t>
             </a:r>
             <a:endParaRPr lang="en-US" sz="900" dirty="0"/>
           </a:p>
@@ -25539,7 +25821,7 @@
                 <a:ea typeface="Consolas" pitchFamily="34" charset="-122"/>
                 <a:cs typeface="Consolas" pitchFamily="34" charset="-120"/>
               </a:rPr>
-              <a:t> = X_train_nn.shape[1]
+              <a:t xml:space="preserve"> = X_train_nn.shape[1]
 </a:t>
             </a:r>
             <a:r>
@@ -25562,7 +25844,7 @@
                 <a:ea typeface="Consolas" pitchFamily="34" charset="-122"/>
                 <a:cs typeface="Consolas" pitchFamily="34" charset="-120"/>
               </a:rPr>
-              <a:t> = keras.Sequential([
+              <a:t xml:space="preserve"> = keras.Sequential([
 </a:t>
             </a:r>
             <a:r>
@@ -25574,7 +25856,7 @@
                 <a:ea typeface="Consolas" pitchFamily="34" charset="-122"/>
                 <a:cs typeface="Consolas" pitchFamily="34" charset="-120"/>
               </a:rPr>
-              <a:t>  layers.Input(shape=(input_dim,)),
+              <a:t xml:space="preserve">  layers.Input(shape=(input_dim,)),
 </a:t>
             </a:r>
             <a:r>
@@ -25586,7 +25868,7 @@
                 <a:ea typeface="Consolas" pitchFamily="34" charset="-122"/>
                 <a:cs typeface="Consolas" pitchFamily="34" charset="-120"/>
               </a:rPr>
-              <a:t>  layers.Dense(</a:t>
+              <a:t xml:space="preserve">  layers.Dense(</a:t>
             </a:r>
             <a:r>
               <a:rPr lang="en-US" sz="1150" dirty="0">
@@ -25642,7 +25924,7 @@
                 <a:ea typeface="Consolas" pitchFamily="34" charset="-122"/>
                 <a:cs typeface="Consolas" pitchFamily="34" charset="-120"/>
               </a:rPr>
-              <a:t>  layers.BatchNormalization(),
+              <a:t xml:space="preserve">  layers.BatchNormalization(),
 </a:t>
             </a:r>
             <a:r>
@@ -25654,7 +25936,7 @@
                 <a:ea typeface="Consolas" pitchFamily="34" charset="-122"/>
                 <a:cs typeface="Consolas" pitchFamily="34" charset="-120"/>
               </a:rPr>
-              <a:t>  layers.Dropout(</a:t>
+              <a:t xml:space="preserve">  layers.Dropout(</a:t>
             </a:r>
             <a:r>
               <a:rPr lang="en-US" sz="1150" dirty="0">
@@ -25733,7 +26015,7 @@
                 <a:ea typeface="Consolas" pitchFamily="34" charset="-122"/>
                 <a:cs typeface="Consolas" pitchFamily="34" charset="-120"/>
               </a:rPr>
-              <a:t>  layers.BatchNormalization(),
+              <a:t xml:space="preserve">  layers.BatchNormalization(),
 </a:t>
             </a:r>
             <a:r>
@@ -25745,7 +26027,7 @@
                 <a:ea typeface="Consolas" pitchFamily="34" charset="-122"/>
                 <a:cs typeface="Consolas" pitchFamily="34" charset="-120"/>
               </a:rPr>
-              <a:t>  layers.Dropout(</a:t>
+              <a:t xml:space="preserve">  layers.Dropout(</a:t>
             </a:r>
             <a:r>
               <a:rPr lang="en-US" sz="1150" dirty="0">
@@ -26668,7 +26950,7 @@
                 <a:ea typeface="Consolas" pitchFamily="34" charset="-122"/>
                 <a:cs typeface="Consolas" pitchFamily="34" charset="-120"/>
               </a:rPr>
-              <a:t>  optimizer = keras.optimizers.</a:t>
+              <a:t xml:space="preserve">  optimizer = keras.optimizers.</a:t>
             </a:r>
             <a:r>
               <a:rPr lang="en-US" sz="1150" dirty="0">
@@ -26712,7 +26994,7 @@
                 <a:ea typeface="Consolas" pitchFamily="34" charset="-122"/>
                 <a:cs typeface="Consolas" pitchFamily="34" charset="-120"/>
               </a:rPr>
-              <a:t>),
+              <a:t xml:space="preserve">),
   loss             = </a:t>
             </a:r>
             <a:r>
@@ -27482,7 +27764,7 @@
                 <a:ea typeface="Consolas" pitchFamily="34" charset="-122"/>
                 <a:cs typeface="Consolas" pitchFamily="34" charset="-120"/>
               </a:rPr>
-              <a:t> = keras.callbacks.</a:t>
+              <a:t xml:space="preserve"> = keras.callbacks.</a:t>
             </a:r>
             <a:r>
               <a:rPr lang="en-US" sz="1150" dirty="0">
@@ -27597,7 +27879,7 @@
                 <a:ea typeface="Consolas" pitchFamily="34" charset="-122"/>
                 <a:cs typeface="Consolas" pitchFamily="34" charset="-120"/>
               </a:rPr>
-              <a:t> = model.</a:t>
+              <a:t xml:space="preserve"> = model.</a:t>
             </a:r>
             <a:r>
               <a:rPr lang="en-US" sz="1150" dirty="0">
@@ -27701,7 +27983,7 @@
                 <a:ea typeface="Consolas" pitchFamily="34" charset="-122"/>
                 <a:cs typeface="Consolas" pitchFamily="34" charset="-120"/>
               </a:rPr>
-              <a:t>  class_weight=class_weight_dict,
+              <a:t xml:space="preserve">  class_weight=class_weight_dict,
 </a:t>
             </a:r>
             <a:r>
@@ -27713,7 +27995,7 @@
                 <a:ea typeface="Consolas" pitchFamily="34" charset="-122"/>
                 <a:cs typeface="Consolas" pitchFamily="34" charset="-120"/>
               </a:rPr>
-              <a:t>  callbacks=[early_stop]</a:t>
+              <a:t xml:space="preserve">  callbacks=[early_stop]</a:t>
             </a:r>
             <a:endParaRPr lang="en-US" sz="1150" dirty="0"/>
           </a:p>
@@ -38868,6 +39150,4650 @@
 </p:sld>
 </file>
 
+<file path=ppt/slides/slide41.xml><?xml version="1.0" encoding="utf-8"?>
+<p:sld xmlns:a="http://schemas.openxmlformats.org/drawingml/2006/main" xmlns:r="http://schemas.openxmlformats.org/officeDocument/2006/relationships" xmlns:p="http://schemas.openxmlformats.org/presentationml/2006/main">
+  <p:cSld>
+    <p:bg>
+      <p:bgPr>
+        <a:solidFill>
+          <a:srgbClr val="FFFFFF"/>
+        </a:solidFill>
+        <a:effectLst/>
+      </p:bgPr>
+    </p:bg>
+    <p:spTree>
+      <p:nvGrpSpPr>
+        <p:cNvPr id="1" name=""/>
+        <p:cNvGrpSpPr/>
+        <p:nvPr/>
+      </p:nvGrpSpPr>
+      <p:grpSpPr>
+        <a:xfrm>
+          <a:off x="0" y="0"/>
+          <a:ext cx="0" cy="0"/>
+          <a:chOff x="0" y="0"/>
+          <a:chExt cx="0" cy="0"/>
+        </a:xfrm>
+      </p:grpSpPr>
+      <p:sp>
+        <p:nvSpPr>
+          <p:cNvPr id="2" name="Shape 0"/>
+          <p:cNvSpPr/>
+          <p:nvPr/>
+        </p:nvSpPr>
+        <p:spPr>
+          <a:xfrm>
+            <a:off x="0" y="0"/>
+            <a:ext cx="164592" cy="5143500"/>
+          </a:xfrm>
+          <a:prstGeom prst="rect">
+            <a:avLst/>
+          </a:prstGeom>
+          <a:solidFill>
+            <a:srgbClr val="0891B2"/>
+          </a:solidFill>
+          <a:ln>
+            <a:noFill/>
+          </a:ln>
+        </p:spPr>
+        <p:txBody>
+          <a:bodyPr/>
+          <a:lstStyle/>
+          <a:p>
+            <a:endParaRPr lang="en-US"/>
+          </a:p>
+        </p:txBody>
+      </p:sp>
+      <p:sp>
+        <p:nvSpPr>
+          <p:cNvPr id="3" name="Text 1"/>
+          <p:cNvSpPr/>
+          <p:nvPr/>
+        </p:nvSpPr>
+        <p:spPr>
+          <a:xfrm>
+            <a:off x="457200" y="1097280"/>
+            <a:ext cx="8229600" cy="1005840"/>
+          </a:xfrm>
+          <a:prstGeom prst="rect">
+            <a:avLst/>
+          </a:prstGeom>
+          <a:noFill/>
+        </p:spPr>
+        <p:txBody>
+          <a:bodyPr wrap="square" lIns="0" tIns="0" rIns="0" bIns="0" rtlCol="0" anchor="ctr"/>
+          <a:lstStyle/>
+          <a:p>
+            <a:pPr marL="0" indent="0" algn="ctr">
+              <a:buNone/>
+            </a:pPr>
+            <a:r>
+              <a:rPr lang="en-US" sz="5400" b="1" dirty="0">
+                <a:solidFill>
+                  <a:srgbClr val="1E2761"/>
+                </a:solidFill>
+                <a:latin typeface="Calibri" pitchFamily="34" charset="0"/>
+                <a:ea typeface="Calibri" pitchFamily="34" charset="-122"/>
+                <a:cs typeface="Calibri" pitchFamily="34" charset="-120"/>
+              </a:rPr>
+              <a:t>Random Forest</a:t>
+            </a:r>
+            <a:endParaRPr lang="en-US" sz="5400" dirty="0"/>
+          </a:p>
+        </p:txBody>
+      </p:sp>
+      <p:sp>
+        <p:nvSpPr>
+          <p:cNvPr id="4" name="Text 2"/>
+          <p:cNvSpPr/>
+          <p:nvPr/>
+        </p:nvSpPr>
+        <p:spPr>
+          <a:xfrm>
+            <a:off x="457200" y="2103120"/>
+            <a:ext cx="8229600" cy="640080"/>
+          </a:xfrm>
+          <a:prstGeom prst="rect">
+            <a:avLst/>
+          </a:prstGeom>
+          <a:noFill/>
+        </p:spPr>
+        <p:txBody>
+          <a:bodyPr wrap="square" lIns="0" tIns="0" rIns="0" bIns="0" rtlCol="0" anchor="ctr"/>
+          <a:lstStyle/>
+          <a:p>
+            <a:pPr marL="0" indent="0" algn="ctr">
+              <a:buNone/>
+            </a:pPr>
+            <a:r>
+              <a:rPr lang="en-US" sz="2600" dirty="0">
+                <a:solidFill>
+                  <a:srgbClr val="FFFFFF"/>
+                </a:solidFill>
+                <a:latin typeface="Calibri" pitchFamily="34" charset="0"/>
+                <a:ea typeface="Calibri" pitchFamily="34" charset="-122"/>
+                <a:cs typeface="Calibri" pitchFamily="34" charset="-120"/>
+              </a:rPr>
+              <a:t>Customer Churn Prediction</a:t>
+            </a:r>
+            <a:endParaRPr lang="en-US" sz="2600" dirty="0"/>
+          </a:p>
+        </p:txBody>
+      </p:sp>
+      <p:sp>
+        <p:nvSpPr>
+          <p:cNvPr id="5" name="Shape 3"/>
+          <p:cNvSpPr/>
+          <p:nvPr/>
+        </p:nvSpPr>
+        <p:spPr>
+          <a:xfrm>
+            <a:off x="3200400" y="2834640"/>
+            <a:ext cx="2743200" cy="36576"/>
+          </a:xfrm>
+          <a:prstGeom prst="rect">
+            <a:avLst/>
+          </a:prstGeom>
+          <a:solidFill>
+            <a:srgbClr val="0891B2"/>
+          </a:solidFill>
+          <a:ln w="12700">
+            <a:solidFill>
+              <a:srgbClr val="0891B2"/>
+            </a:solidFill>
+            <a:prstDash val="solid"/>
+          </a:ln>
+        </p:spPr>
+        <p:txBody>
+          <a:bodyPr/>
+          <a:lstStyle/>
+          <a:p>
+            <a:endParaRPr lang="en-US"/>
+          </a:p>
+        </p:txBody>
+      </p:sp>
+      <p:sp>
+        <p:nvSpPr>
+          <p:cNvPr id="6" name="Text 4"/>
+          <p:cNvSpPr/>
+          <p:nvPr/>
+        </p:nvSpPr>
+        <p:spPr>
+          <a:xfrm>
+            <a:off x="457200" y="3017520"/>
+            <a:ext cx="8229600" cy="457200"/>
+          </a:xfrm>
+          <a:prstGeom prst="rect">
+            <a:avLst/>
+          </a:prstGeom>
+          <a:noFill/>
+        </p:spPr>
+        <p:txBody>
+          <a:bodyPr wrap="square" lIns="0" tIns="0" rIns="0" bIns="0" rtlCol="0" anchor="ctr"/>
+          <a:lstStyle/>
+          <a:p>
+            <a:pPr marL="0" indent="0" algn="ctr">
+              <a:buNone/>
+            </a:pPr>
+            <a:r>
+              <a:rPr lang="en-US" sz="1400" i="1" dirty="0">
+                <a:solidFill>
+                  <a:srgbClr val="1E2761"/>
+                </a:solidFill>
+                <a:latin typeface="Calibri" pitchFamily="34" charset="0"/>
+                <a:ea typeface="Calibri" pitchFamily="34" charset="-122"/>
+                <a:cs typeface="Calibri" pitchFamily="34" charset="-120"/>
+              </a:rPr>
+              <a:t>Ensemble Decision Trees for Telecom Churn Prediction</a:t>
+            </a:r>
+            <a:endParaRPr lang="en-US" sz="1400" dirty="0"/>
+          </a:p>
+        </p:txBody>
+      </p:sp>
+      <p:sp>
+        <p:nvSpPr>
+          <p:cNvPr id="7" name="Text 5"/>
+          <p:cNvSpPr/>
+          <p:nvPr/>
+        </p:nvSpPr>
+        <p:spPr>
+          <a:xfrm>
+            <a:off x="457200" y="4206240"/>
+            <a:ext cx="8229600" cy="365760"/>
+          </a:xfrm>
+          <a:prstGeom prst="rect">
+            <a:avLst/>
+          </a:prstGeom>
+          <a:solidFill>
+            <a:srgbClr val="1E2761"/>
+          </a:solidFill>
+          <a:ln>
+            <a:noFill/>
+          </a:ln>
+        </p:spPr>
+        <p:txBody>
+          <a:bodyPr wrap="square" lIns="0" tIns="0" rIns="0" bIns="0" rtlCol="0" anchor="ctr"/>
+          <a:lstStyle/>
+          <a:p>
+            <a:pPr marL="0" indent="0" algn="ctr">
+              <a:buNone/>
+            </a:pPr>
+            <a:r>
+              <a:rPr lang="en-US" sz="1300" b="1" dirty="0">
+                <a:solidFill>
+                  <a:srgbClr val="FFFFFF"/>
+                </a:solidFill>
+                <a:latin typeface="Calibri" pitchFamily="34" charset="0"/>
+                <a:ea typeface="Calibri" pitchFamily="34" charset="-122"/>
+                <a:cs typeface="Calibri" pitchFamily="34" charset="-120"/>
+              </a:rPr>
+              <a:t>Accuracy: 93.1%   |   F1 Score: 0.69   |   Churn Recall: 72%</a:t>
+            </a:r>
+            <a:endParaRPr lang="en-US" sz="1300" dirty="0"/>
+          </a:p>
+        </p:txBody>
+      </p:sp>
+    </p:spTree>
+  </p:cSld>
+  <p:clrMapOvr>
+    <a:masterClrMapping/>
+  </p:clrMapOvr>
+</p:sld>
+</file>
+
+<file path=ppt/slides/slide42.xml><?xml version="1.0" encoding="utf-8"?>
+<p:sld xmlns:a="http://schemas.openxmlformats.org/drawingml/2006/main" xmlns:r="http://schemas.openxmlformats.org/officeDocument/2006/relationships" xmlns:p="http://schemas.openxmlformats.org/presentationml/2006/main">
+  <p:cSld>
+    <p:bg>
+      <p:bgPr>
+        <a:solidFill>
+          <a:srgbClr val="FFFFFF"/>
+        </a:solidFill>
+        <a:effectLst/>
+      </p:bgPr>
+    </p:bg>
+    <p:spTree>
+      <p:nvGrpSpPr>
+        <p:cNvPr id="1" name=""/>
+        <p:cNvGrpSpPr/>
+        <p:nvPr/>
+      </p:nvGrpSpPr>
+      <p:grpSpPr>
+        <a:xfrm>
+          <a:off x="0" y="0"/>
+          <a:ext cx="0" cy="0"/>
+          <a:chOff x="0" y="0"/>
+          <a:chExt cx="0" cy="0"/>
+        </a:xfrm>
+      </p:grpSpPr>
+      <p:sp>
+        <p:nvSpPr>
+          <p:cNvPr id="2" name="Shape 0"/>
+          <p:cNvSpPr/>
+          <p:nvPr/>
+        </p:nvSpPr>
+        <p:spPr>
+          <a:xfrm>
+            <a:off x="0" y="0"/>
+            <a:ext cx="9144000" cy="822960"/>
+          </a:xfrm>
+          <a:prstGeom prst="rect">
+            <a:avLst/>
+          </a:prstGeom>
+          <a:solidFill>
+            <a:srgbClr val="1E2761"/>
+          </a:solidFill>
+          <a:ln>
+            <a:noFill/>
+          </a:ln>
+        </p:spPr>
+        <p:txBody>
+          <a:bodyPr/>
+          <a:lstStyle/>
+          <a:p>
+            <a:endParaRPr lang="en-US"/>
+          </a:p>
+        </p:txBody>
+      </p:sp>
+      <p:sp>
+        <p:nvSpPr>
+          <p:cNvPr id="3" name="Text 1"/>
+          <p:cNvSpPr/>
+          <p:nvPr/>
+        </p:nvSpPr>
+        <p:spPr>
+          <a:xfrm>
+            <a:off x="365760" y="91440"/>
+            <a:ext cx="8229600" cy="640080"/>
+          </a:xfrm>
+          <a:prstGeom prst="rect">
+            <a:avLst/>
+          </a:prstGeom>
+          <a:solidFill>
+            <a:srgbClr val="1E2761"/>
+          </a:solidFill>
+          <a:ln>
+            <a:noFill/>
+          </a:ln>
+        </p:spPr>
+        <p:txBody>
+          <a:bodyPr wrap="square" lIns="0" tIns="0" rIns="0" bIns="0" rtlCol="0" anchor="ctr"/>
+          <a:lstStyle/>
+          <a:p>
+            <a:pPr marL="0" indent="0">
+              <a:buNone/>
+            </a:pPr>
+            <a:r>
+              <a:rPr lang="en-US" sz="2800" b="1" dirty="0">
+                <a:solidFill>
+                  <a:srgbClr val="FFFFFF"/>
+                </a:solidFill>
+                <a:latin typeface="Calibri" pitchFamily="34" charset="0"/>
+                <a:ea typeface="Calibri" pitchFamily="34" charset="-122"/>
+                <a:cs typeface="Calibri" pitchFamily="34" charset="-120"/>
+              </a:rPr>
+              <a:t>What is Random Forest?</a:t>
+            </a:r>
+            <a:endParaRPr lang="en-US" sz="2800" dirty="0"/>
+          </a:p>
+        </p:txBody>
+      </p:sp>
+      <p:sp>
+        <p:nvSpPr>
+          <p:cNvPr id="4" name="Shape 2"/>
+          <p:cNvSpPr/>
+          <p:nvPr/>
+        </p:nvSpPr>
+        <p:spPr>
+          <a:xfrm>
+            <a:off x="274320" y="1005840"/>
+            <a:ext cx="2743200" cy="3474720"/>
+          </a:xfrm>
+          <a:prstGeom prst="rect">
+            <a:avLst/>
+          </a:prstGeom>
+          <a:solidFill>
+            <a:srgbClr val="FFFFFF"/>
+          </a:solidFill>
+          <a:ln w="12700">
+            <a:solidFill>
+              <a:srgbClr val="E2E8F0"/>
+            </a:solidFill>
+            <a:prstDash val="solid"/>
+          </a:ln>
+          <a:effectLst>
+            <a:outerShdw blurRad="101600" dist="38100" dir="8100000" algn="bl" rotWithShape="0">
+              <a:srgbClr val="000000">
+                <a:alpha val="12000"/>
+              </a:srgbClr>
+            </a:outerShdw>
+          </a:effectLst>
+        </p:spPr>
+        <p:txBody>
+          <a:bodyPr/>
+          <a:lstStyle/>
+          <a:p>
+            <a:endParaRPr lang="en-US"/>
+          </a:p>
+        </p:txBody>
+      </p:sp>
+      <p:sp>
+        <p:nvSpPr>
+          <p:cNvPr id="5" name="Shape 3"/>
+          <p:cNvSpPr/>
+          <p:nvPr/>
+        </p:nvSpPr>
+        <p:spPr>
+          <a:xfrm>
+            <a:off x="274320" y="1005840"/>
+            <a:ext cx="2743200" cy="73152"/>
+          </a:xfrm>
+          <a:prstGeom prst="rect">
+            <a:avLst/>
+          </a:prstGeom>
+          <a:solidFill>
+            <a:srgbClr val="0891B2"/>
+          </a:solidFill>
+          <a:ln w="12700">
+            <a:solidFill>
+              <a:srgbClr val="0891B2"/>
+            </a:solidFill>
+            <a:prstDash val="solid"/>
+          </a:ln>
+        </p:spPr>
+        <p:txBody>
+          <a:bodyPr/>
+          <a:lstStyle/>
+          <a:p>
+            <a:endParaRPr lang="en-US"/>
+          </a:p>
+        </p:txBody>
+      </p:sp>
+      <p:sp>
+        <p:nvSpPr>
+          <p:cNvPr id="6" name="Text 4"/>
+          <p:cNvSpPr/>
+          <p:nvPr/>
+        </p:nvSpPr>
+        <p:spPr>
+          <a:xfrm>
+            <a:off x="411480" y="1170432"/>
+            <a:ext cx="2468880" cy="457200"/>
+          </a:xfrm>
+          <a:prstGeom prst="rect">
+            <a:avLst/>
+          </a:prstGeom>
+          <a:noFill/>
+        </p:spPr>
+        <p:txBody>
+          <a:bodyPr wrap="square" lIns="0" tIns="0" rIns="0" bIns="0" rtlCol="0" anchor="ctr"/>
+          <a:lstStyle/>
+          <a:p>
+            <a:pPr marL="0" indent="0">
+              <a:buNone/>
+            </a:pPr>
+            <a:r>
+              <a:rPr lang="en-US" sz="1500" b="1" dirty="0">
+                <a:solidFill>
+                  <a:srgbClr val="1E2761"/>
+                </a:solidFill>
+                <a:latin typeface="Calibri" pitchFamily="34" charset="0"/>
+                <a:ea typeface="Calibri" pitchFamily="34" charset="-122"/>
+                <a:cs typeface="Calibri" pitchFamily="34" charset="-120"/>
+              </a:rPr>
+              <a:t>Ensemble Learning</a:t>
+            </a:r>
+            <a:endParaRPr lang="en-US" sz="1500" dirty="0"/>
+          </a:p>
+        </p:txBody>
+      </p:sp>
+      <p:sp>
+        <p:nvSpPr>
+          <p:cNvPr id="7" name="Text 5"/>
+          <p:cNvSpPr/>
+          <p:nvPr/>
+        </p:nvSpPr>
+        <p:spPr>
+          <a:xfrm>
+            <a:off x="411480" y="1737360"/>
+            <a:ext cx="2468880" cy="2560320"/>
+          </a:xfrm>
+          <a:prstGeom prst="rect">
+            <a:avLst/>
+          </a:prstGeom>
+          <a:noFill/>
+        </p:spPr>
+        <p:txBody>
+          <a:bodyPr wrap="square" lIns="0" tIns="0" rIns="0" bIns="0" rtlCol="0" anchor="t"/>
+          <a:lstStyle/>
+          <a:p>
+            <a:pPr marL="0" indent="0">
+              <a:buNone/>
+            </a:pPr>
+            <a:r>
+              <a:rPr lang="en-US" sz="1200" dirty="0">
+                <a:solidFill>
+                  <a:srgbClr val="1E2761"/>
+                </a:solidFill>
+                <a:latin typeface="Calibri" pitchFamily="34" charset="0"/>
+                <a:ea typeface="Calibri" pitchFamily="34" charset="-122"/>
+                <a:cs typeface="Calibri" pitchFamily="34" charset="-120"/>
+              </a:rPr>
+              <a:t>Random Forest trains many independent decision trees on random subsets of data using bagging (bootstrap aggregating), then combines their votes for a final prediction.</a:t>
+            </a:r>
+            <a:endParaRPr lang="en-US" sz="1200" dirty="0"/>
+          </a:p>
+        </p:txBody>
+      </p:sp>
+      <p:sp>
+        <p:nvSpPr>
+          <p:cNvPr id="8" name="Shape 6"/>
+          <p:cNvSpPr/>
+          <p:nvPr/>
+        </p:nvSpPr>
+        <p:spPr>
+          <a:xfrm>
+            <a:off x="3200400" y="1005840"/>
+            <a:ext cx="2743200" cy="3474720"/>
+          </a:xfrm>
+          <a:prstGeom prst="rect">
+            <a:avLst/>
+          </a:prstGeom>
+          <a:solidFill>
+            <a:srgbClr val="FFFFFF"/>
+          </a:solidFill>
+          <a:ln w="12700">
+            <a:solidFill>
+              <a:srgbClr val="E2E8F0"/>
+            </a:solidFill>
+            <a:prstDash val="solid"/>
+          </a:ln>
+          <a:effectLst>
+            <a:outerShdw blurRad="101600" dist="38100" dir="8100000" algn="bl" rotWithShape="0">
+              <a:srgbClr val="000000">
+                <a:alpha val="12000"/>
+              </a:srgbClr>
+            </a:outerShdw>
+          </a:effectLst>
+        </p:spPr>
+        <p:txBody>
+          <a:bodyPr/>
+          <a:lstStyle/>
+          <a:p>
+            <a:endParaRPr lang="en-US"/>
+          </a:p>
+        </p:txBody>
+      </p:sp>
+      <p:sp>
+        <p:nvSpPr>
+          <p:cNvPr id="9" name="Shape 7"/>
+          <p:cNvSpPr/>
+          <p:nvPr/>
+        </p:nvSpPr>
+        <p:spPr>
+          <a:xfrm>
+            <a:off x="3200400" y="1005840"/>
+            <a:ext cx="2743200" cy="73152"/>
+          </a:xfrm>
+          <a:prstGeom prst="rect">
+            <a:avLst/>
+          </a:prstGeom>
+          <a:solidFill>
+            <a:srgbClr val="0891B2"/>
+          </a:solidFill>
+          <a:ln w="12700">
+            <a:solidFill>
+              <a:srgbClr val="0891B2"/>
+            </a:solidFill>
+            <a:prstDash val="solid"/>
+          </a:ln>
+        </p:spPr>
+        <p:txBody>
+          <a:bodyPr/>
+          <a:lstStyle/>
+          <a:p>
+            <a:endParaRPr lang="en-US"/>
+          </a:p>
+        </p:txBody>
+      </p:sp>
+      <p:sp>
+        <p:nvSpPr>
+          <p:cNvPr id="10" name="Text 8"/>
+          <p:cNvSpPr/>
+          <p:nvPr/>
+        </p:nvSpPr>
+        <p:spPr>
+          <a:xfrm>
+            <a:off x="3337560" y="1170432"/>
+            <a:ext cx="2468880" cy="457200"/>
+          </a:xfrm>
+          <a:prstGeom prst="rect">
+            <a:avLst/>
+          </a:prstGeom>
+          <a:noFill/>
+        </p:spPr>
+        <p:txBody>
+          <a:bodyPr wrap="square" lIns="0" tIns="0" rIns="0" bIns="0" rtlCol="0" anchor="ctr"/>
+          <a:lstStyle/>
+          <a:p>
+            <a:pPr marL="0" indent="0">
+              <a:buNone/>
+            </a:pPr>
+            <a:r>
+              <a:rPr lang="en-US" sz="1500" b="1" dirty="0">
+                <a:solidFill>
+                  <a:srgbClr val="1E2761"/>
+                </a:solidFill>
+                <a:latin typeface="Calibri" pitchFamily="34" charset="0"/>
+                <a:ea typeface="Calibri" pitchFamily="34" charset="-122"/>
+                <a:cs typeface="Calibri" pitchFamily="34" charset="-120"/>
+              </a:rPr>
+              <a:t>Random Feature Selection</a:t>
+            </a:r>
+            <a:endParaRPr lang="en-US" sz="1500" dirty="0"/>
+          </a:p>
+        </p:txBody>
+      </p:sp>
+      <p:sp>
+        <p:nvSpPr>
+          <p:cNvPr id="11" name="Text 9"/>
+          <p:cNvSpPr/>
+          <p:nvPr/>
+        </p:nvSpPr>
+        <p:spPr>
+          <a:xfrm>
+            <a:off x="3337560" y="1737360"/>
+            <a:ext cx="2468880" cy="2560320"/>
+          </a:xfrm>
+          <a:prstGeom prst="rect">
+            <a:avLst/>
+          </a:prstGeom>
+          <a:noFill/>
+        </p:spPr>
+        <p:txBody>
+          <a:bodyPr wrap="square" lIns="0" tIns="0" rIns="0" bIns="0" rtlCol="0" anchor="t"/>
+          <a:lstStyle/>
+          <a:p>
+            <a:pPr marL="0" indent="0">
+              <a:buNone/>
+            </a:pPr>
+            <a:r>
+              <a:rPr lang="en-US" sz="1200" dirty="0">
+                <a:solidFill>
+                  <a:srgbClr val="1E2761"/>
+                </a:solidFill>
+                <a:latin typeface="Calibri" pitchFamily="34" charset="0"/>
+                <a:ea typeface="Calibri" pitchFamily="34" charset="-122"/>
+                <a:cs typeface="Calibri" pitchFamily="34" charset="-120"/>
+              </a:rPr>
+              <a:t>At each split, only a random subset of features is considered. This decorrelates the trees and reduces variance, improving generalisation on unseen data.</a:t>
+            </a:r>
+            <a:endParaRPr lang="en-US" sz="1200" dirty="0"/>
+          </a:p>
+        </p:txBody>
+      </p:sp>
+      <p:sp>
+        <p:nvSpPr>
+          <p:cNvPr id="12" name="Shape 10"/>
+          <p:cNvSpPr/>
+          <p:nvPr/>
+        </p:nvSpPr>
+        <p:spPr>
+          <a:xfrm>
+            <a:off x="6126480" y="1005840"/>
+            <a:ext cx="2743200" cy="3474720"/>
+          </a:xfrm>
+          <a:prstGeom prst="rect">
+            <a:avLst/>
+          </a:prstGeom>
+          <a:solidFill>
+            <a:srgbClr val="FFFFFF"/>
+          </a:solidFill>
+          <a:ln w="12700">
+            <a:solidFill>
+              <a:srgbClr val="E2E8F0"/>
+            </a:solidFill>
+            <a:prstDash val="solid"/>
+          </a:ln>
+          <a:effectLst>
+            <a:outerShdw blurRad="101600" dist="38100" dir="8100000" algn="bl" rotWithShape="0">
+              <a:srgbClr val="000000">
+                <a:alpha val="12000"/>
+              </a:srgbClr>
+            </a:outerShdw>
+          </a:effectLst>
+        </p:spPr>
+        <p:txBody>
+          <a:bodyPr/>
+          <a:lstStyle/>
+          <a:p>
+            <a:endParaRPr lang="en-US"/>
+          </a:p>
+        </p:txBody>
+      </p:sp>
+      <p:sp>
+        <p:nvSpPr>
+          <p:cNvPr id="13" name="Shape 11"/>
+          <p:cNvSpPr/>
+          <p:nvPr/>
+        </p:nvSpPr>
+        <p:spPr>
+          <a:xfrm>
+            <a:off x="6126480" y="1005840"/>
+            <a:ext cx="2743200" cy="73152"/>
+          </a:xfrm>
+          <a:prstGeom prst="rect">
+            <a:avLst/>
+          </a:prstGeom>
+          <a:solidFill>
+            <a:srgbClr val="0891B2"/>
+          </a:solidFill>
+          <a:ln w="12700">
+            <a:solidFill>
+              <a:srgbClr val="0891B2"/>
+            </a:solidFill>
+            <a:prstDash val="solid"/>
+          </a:ln>
+        </p:spPr>
+        <p:txBody>
+          <a:bodyPr/>
+          <a:lstStyle/>
+          <a:p>
+            <a:endParaRPr lang="en-US"/>
+          </a:p>
+        </p:txBody>
+      </p:sp>
+      <p:sp>
+        <p:nvSpPr>
+          <p:cNvPr id="14" name="Text 12"/>
+          <p:cNvSpPr/>
+          <p:nvPr/>
+        </p:nvSpPr>
+        <p:spPr>
+          <a:xfrm>
+            <a:off x="6263640" y="1170432"/>
+            <a:ext cx="2468880" cy="457200"/>
+          </a:xfrm>
+          <a:prstGeom prst="rect">
+            <a:avLst/>
+          </a:prstGeom>
+          <a:noFill/>
+        </p:spPr>
+        <p:txBody>
+          <a:bodyPr wrap="square" lIns="0" tIns="0" rIns="0" bIns="0" rtlCol="0" anchor="ctr"/>
+          <a:lstStyle/>
+          <a:p>
+            <a:pPr marL="0" indent="0">
+              <a:buNone/>
+            </a:pPr>
+            <a:r>
+              <a:rPr lang="en-US" sz="1500" b="1" dirty="0">
+                <a:solidFill>
+                  <a:srgbClr val="1E2761"/>
+                </a:solidFill>
+                <a:latin typeface="Calibri" pitchFamily="34" charset="0"/>
+                <a:ea typeface="Calibri" pitchFamily="34" charset="-122"/>
+                <a:cs typeface="Calibri" pitchFamily="34" charset="-120"/>
+              </a:rPr>
+              <a:t>Built-In Feature Ranking</a:t>
+            </a:r>
+            <a:endParaRPr lang="en-US" sz="1500" dirty="0"/>
+          </a:p>
+        </p:txBody>
+      </p:sp>
+      <p:sp>
+        <p:nvSpPr>
+          <p:cNvPr id="15" name="Text 13"/>
+          <p:cNvSpPr/>
+          <p:nvPr/>
+        </p:nvSpPr>
+        <p:spPr>
+          <a:xfrm>
+            <a:off x="6263640" y="1737360"/>
+            <a:ext cx="2468880" cy="2560320"/>
+          </a:xfrm>
+          <a:prstGeom prst="rect">
+            <a:avLst/>
+          </a:prstGeom>
+          <a:noFill/>
+        </p:spPr>
+        <p:txBody>
+          <a:bodyPr wrap="square" lIns="0" tIns="0" rIns="0" bIns="0" rtlCol="0" anchor="t"/>
+          <a:lstStyle/>
+          <a:p>
+            <a:pPr marL="0" indent="0">
+              <a:buNone/>
+            </a:pPr>
+            <a:r>
+              <a:rPr lang="en-US" sz="1200" dirty="0">
+                <a:solidFill>
+                  <a:srgbClr val="1E2761"/>
+                </a:solidFill>
+                <a:latin typeface="Calibri" pitchFamily="34" charset="0"/>
+                <a:ea typeface="Calibri" pitchFamily="34" charset="-122"/>
+                <a:cs typeface="Calibri" pitchFamily="34" charset="-120"/>
+              </a:rPr>
+              <a:t>Random Forest provides feature importance scores based on how much each feature reduces impurity across all trees, identifying key churn drivers.</a:t>
+            </a:r>
+            <a:endParaRPr lang="en-US" sz="1200" dirty="0"/>
+          </a:p>
+        </p:txBody>
+      </p:sp>
+      <p:sp>
+        <p:nvSpPr>
+          <p:cNvPr id="16" name="Text 14"/>
+          <p:cNvSpPr/>
+          <p:nvPr/>
+        </p:nvSpPr>
+        <p:spPr>
+          <a:xfrm>
+            <a:off x="457200" y="4663440"/>
+            <a:ext cx="8229600" cy="320040"/>
+          </a:xfrm>
+          <a:prstGeom prst="rect">
+            <a:avLst/>
+          </a:prstGeom>
+          <a:solidFill>
+            <a:srgbClr val="1E2761"/>
+          </a:solidFill>
+          <a:ln>
+            <a:noFill/>
+          </a:ln>
+        </p:spPr>
+        <p:txBody>
+          <a:bodyPr wrap="square" lIns="0" tIns="0" rIns="0" bIns="0" rtlCol="0" anchor="ctr"/>
+          <a:lstStyle/>
+          <a:p>
+            <a:pPr marL="0" indent="0" algn="ctr">
+              <a:buNone/>
+            </a:pPr>
+            <a:r>
+              <a:rPr lang="en-US" sz="1200" i="1" dirty="0">
+                <a:solidFill>
+                  <a:srgbClr val="FFFFFF"/>
+                </a:solidFill>
+                <a:latin typeface="Calibri" pitchFamily="34" charset="0"/>
+                <a:ea typeface="Calibri" pitchFamily="34" charset="-122"/>
+                <a:cs typeface="Calibri" pitchFamily="34" charset="-120"/>
+              </a:rPr>
+              <a:t>Tree 1 (random subset)  +  Tree 2 (random subset)  +  ...  +  Tree N  =  Majority Vote</a:t>
+            </a:r>
+            <a:endParaRPr lang="en-US" sz="1200" dirty="0"/>
+          </a:p>
+        </p:txBody>
+      </p:sp>
+    </p:spTree>
+  </p:cSld>
+  <p:clrMapOvr>
+    <a:masterClrMapping/>
+  </p:clrMapOvr>
+</p:sld>
+</file>
+
+<file path=ppt/slides/slide43.xml><?xml version="1.0" encoding="utf-8"?>
+<p:sld xmlns:a="http://schemas.openxmlformats.org/drawingml/2006/main" xmlns:r="http://schemas.openxmlformats.org/officeDocument/2006/relationships" xmlns:p="http://schemas.openxmlformats.org/presentationml/2006/main">
+  <p:cSld>
+    <p:bg>
+      <p:bgPr>
+        <a:solidFill>
+          <a:srgbClr val="FFFFFF"/>
+        </a:solidFill>
+        <a:effectLst/>
+      </p:bgPr>
+    </p:bg>
+    <p:spTree>
+      <p:nvGrpSpPr>
+        <p:cNvPr id="1" name=""/>
+        <p:cNvGrpSpPr/>
+        <p:nvPr/>
+      </p:nvGrpSpPr>
+      <p:grpSpPr>
+        <a:xfrm>
+          <a:off x="0" y="0"/>
+          <a:ext cx="0" cy="0"/>
+          <a:chOff x="0" y="0"/>
+          <a:chExt cx="0" cy="0"/>
+        </a:xfrm>
+      </p:grpSpPr>
+      <p:sp>
+        <p:nvSpPr>
+          <p:cNvPr id="2" name="Shape 0"/>
+          <p:cNvSpPr/>
+          <p:nvPr/>
+        </p:nvSpPr>
+        <p:spPr>
+          <a:xfrm>
+            <a:off x="0" y="0"/>
+            <a:ext cx="9144000" cy="822960"/>
+          </a:xfrm>
+          <a:prstGeom prst="rect">
+            <a:avLst/>
+          </a:prstGeom>
+          <a:solidFill>
+            <a:srgbClr val="1E2761"/>
+          </a:solidFill>
+          <a:ln>
+            <a:noFill/>
+          </a:ln>
+        </p:spPr>
+        <p:txBody>
+          <a:bodyPr/>
+          <a:lstStyle/>
+          <a:p>
+            <a:endParaRPr lang="en-US"/>
+          </a:p>
+        </p:txBody>
+      </p:sp>
+      <p:sp>
+        <p:nvSpPr>
+          <p:cNvPr id="3" name="Text 1"/>
+          <p:cNvSpPr/>
+          <p:nvPr/>
+        </p:nvSpPr>
+        <p:spPr>
+          <a:xfrm>
+            <a:off x="365760" y="91440"/>
+            <a:ext cx="8229600" cy="640080"/>
+          </a:xfrm>
+          <a:prstGeom prst="rect">
+            <a:avLst/>
+          </a:prstGeom>
+          <a:solidFill>
+            <a:srgbClr val="1E2761"/>
+          </a:solidFill>
+          <a:ln>
+            <a:noFill/>
+          </a:ln>
+        </p:spPr>
+        <p:txBody>
+          <a:bodyPr wrap="square" lIns="0" tIns="0" rIns="0" bIns="0" rtlCol="0" anchor="ctr"/>
+          <a:lstStyle/>
+          <a:p>
+            <a:pPr marL="0" indent="0">
+              <a:buNone/>
+            </a:pPr>
+            <a:r>
+              <a:rPr lang="en-US" sz="2800" b="1" dirty="0">
+                <a:solidFill>
+                  <a:srgbClr val="FFFFFF"/>
+                </a:solidFill>
+                <a:latin typeface="Calibri" pitchFamily="34" charset="0"/>
+                <a:ea typeface="Calibri" pitchFamily="34" charset="-122"/>
+                <a:cs typeface="Calibri" pitchFamily="34" charset="-120"/>
+              </a:rPr>
+              <a:t>Why These Parameters?</a:t>
+            </a:r>
+            <a:endParaRPr lang="en-US" sz="2800" dirty="0"/>
+          </a:p>
+        </p:txBody>
+      </p:sp>
+      <p:sp>
+        <p:nvSpPr>
+          <p:cNvPr id="4" name="Shape 2"/>
+          <p:cNvSpPr/>
+          <p:nvPr/>
+        </p:nvSpPr>
+        <p:spPr>
+          <a:xfrm>
+            <a:off x="274320" y="960120"/>
+            <a:ext cx="8595360" cy="841248"/>
+          </a:xfrm>
+          <a:prstGeom prst="rect">
+            <a:avLst/>
+          </a:prstGeom>
+          <a:solidFill>
+            <a:srgbClr val="FFFFFF"/>
+          </a:solidFill>
+          <a:ln w="12700">
+            <a:solidFill>
+              <a:srgbClr val="E2E8F0"/>
+            </a:solidFill>
+            <a:prstDash val="solid"/>
+          </a:ln>
+          <a:effectLst>
+            <a:outerShdw blurRad="101600" dist="38100" dir="8100000" algn="bl" rotWithShape="0">
+              <a:srgbClr val="000000">
+                <a:alpha val="12000"/>
+              </a:srgbClr>
+            </a:outerShdw>
+          </a:effectLst>
+        </p:spPr>
+        <p:txBody>
+          <a:bodyPr/>
+          <a:lstStyle/>
+          <a:p>
+            <a:endParaRPr lang="en-US"/>
+          </a:p>
+        </p:txBody>
+      </p:sp>
+      <p:sp>
+        <p:nvSpPr>
+          <p:cNvPr id="5" name="Shape 3"/>
+          <p:cNvSpPr/>
+          <p:nvPr/>
+        </p:nvSpPr>
+        <p:spPr>
+          <a:xfrm>
+            <a:off x="274320" y="960120"/>
+            <a:ext cx="64008" cy="841248"/>
+          </a:xfrm>
+          <a:prstGeom prst="rect">
+            <a:avLst/>
+          </a:prstGeom>
+          <a:solidFill>
+            <a:srgbClr val="0891B2"/>
+          </a:solidFill>
+          <a:ln w="12700">
+            <a:solidFill>
+              <a:srgbClr val="0891B2"/>
+            </a:solidFill>
+            <a:prstDash val="solid"/>
+          </a:ln>
+        </p:spPr>
+        <p:txBody>
+          <a:bodyPr/>
+          <a:lstStyle/>
+          <a:p>
+            <a:endParaRPr lang="en-US"/>
+          </a:p>
+        </p:txBody>
+      </p:sp>
+      <p:sp>
+        <p:nvSpPr>
+          <p:cNvPr id="6" name="Text 4"/>
+          <p:cNvSpPr/>
+          <p:nvPr/>
+        </p:nvSpPr>
+        <p:spPr>
+          <a:xfrm>
+            <a:off x="502920" y="1033272"/>
+            <a:ext cx="2926080" cy="320040"/>
+          </a:xfrm>
+          <a:prstGeom prst="rect">
+            <a:avLst/>
+          </a:prstGeom>
+          <a:noFill/>
+        </p:spPr>
+        <p:txBody>
+          <a:bodyPr wrap="square" lIns="0" tIns="0" rIns="0" bIns="0" rtlCol="0" anchor="ctr"/>
+          <a:lstStyle/>
+          <a:p>
+            <a:pPr marL="0" indent="0">
+              <a:buNone/>
+            </a:pPr>
+            <a:r>
+              <a:rPr lang="en-US" sz="1300" b="1" dirty="0">
+                <a:solidFill>
+                  <a:srgbClr val="1E2761"/>
+                </a:solidFill>
+                <a:latin typeface="Consolas" pitchFamily="34" charset="0"/>
+                <a:ea typeface="Consolas" pitchFamily="34" charset="-122"/>
+                <a:cs typeface="Consolas" pitchFamily="34" charset="-120"/>
+              </a:rPr>
+              <a:t>n_estimators = 100</a:t>
+            </a:r>
+            <a:endParaRPr lang="en-US" sz="1300" dirty="0"/>
+          </a:p>
+        </p:txBody>
+      </p:sp>
+      <p:sp>
+        <p:nvSpPr>
+          <p:cNvPr id="7" name="Text 5"/>
+          <p:cNvSpPr/>
+          <p:nvPr/>
+        </p:nvSpPr>
+        <p:spPr>
+          <a:xfrm>
+            <a:off x="502920" y="1399032"/>
+            <a:ext cx="8138160" cy="347472"/>
+          </a:xfrm>
+          <a:prstGeom prst="rect">
+            <a:avLst/>
+          </a:prstGeom>
+          <a:noFill/>
+        </p:spPr>
+        <p:txBody>
+          <a:bodyPr wrap="square" lIns="0" tIns="0" rIns="0" bIns="0" rtlCol="0" anchor="ctr"/>
+          <a:lstStyle/>
+          <a:p>
+            <a:pPr marL="0" indent="0">
+              <a:buNone/>
+            </a:pPr>
+            <a:r>
+              <a:rPr lang="en-US" sz="1150" dirty="0">
+                <a:solidFill>
+                  <a:srgbClr val="1E2761"/>
+                </a:solidFill>
+                <a:latin typeface="Calibri" pitchFamily="34" charset="0"/>
+                <a:ea typeface="Calibri" pitchFamily="34" charset="-122"/>
+                <a:cs typeface="Calibri" pitchFamily="34" charset="-120"/>
+              </a:rPr>
+              <a:t>Balances accuracy and training time. 100 trees provides sufficient diversity for robust ensemble voting without excessive compute or diminishing returns.</a:t>
+            </a:r>
+            <a:endParaRPr lang="en-US" sz="1150" dirty="0"/>
+          </a:p>
+        </p:txBody>
+      </p:sp>
+      <p:sp>
+        <p:nvSpPr>
+          <p:cNvPr id="8" name="Shape 6"/>
+          <p:cNvSpPr/>
+          <p:nvPr/>
+        </p:nvSpPr>
+        <p:spPr>
+          <a:xfrm>
+            <a:off x="274320" y="1965960"/>
+            <a:ext cx="8595360" cy="841248"/>
+          </a:xfrm>
+          <a:prstGeom prst="rect">
+            <a:avLst/>
+          </a:prstGeom>
+          <a:solidFill>
+            <a:srgbClr val="FFFFFF"/>
+          </a:solidFill>
+          <a:ln w="12700">
+            <a:solidFill>
+              <a:srgbClr val="E2E8F0"/>
+            </a:solidFill>
+            <a:prstDash val="solid"/>
+          </a:ln>
+          <a:effectLst>
+            <a:outerShdw blurRad="101600" dist="38100" dir="8100000" algn="bl" rotWithShape="0">
+              <a:srgbClr val="000000">
+                <a:alpha val="12000"/>
+              </a:srgbClr>
+            </a:outerShdw>
+          </a:effectLst>
+        </p:spPr>
+        <p:txBody>
+          <a:bodyPr/>
+          <a:lstStyle/>
+          <a:p>
+            <a:endParaRPr lang="en-US"/>
+          </a:p>
+        </p:txBody>
+      </p:sp>
+      <p:sp>
+        <p:nvSpPr>
+          <p:cNvPr id="9" name="Shape 7"/>
+          <p:cNvSpPr/>
+          <p:nvPr/>
+        </p:nvSpPr>
+        <p:spPr>
+          <a:xfrm>
+            <a:off x="274320" y="1965960"/>
+            <a:ext cx="64008" cy="841248"/>
+          </a:xfrm>
+          <a:prstGeom prst="rect">
+            <a:avLst/>
+          </a:prstGeom>
+          <a:solidFill>
+            <a:srgbClr val="0891B2"/>
+          </a:solidFill>
+          <a:ln w="12700">
+            <a:solidFill>
+              <a:srgbClr val="0891B2"/>
+            </a:solidFill>
+            <a:prstDash val="solid"/>
+          </a:ln>
+        </p:spPr>
+        <p:txBody>
+          <a:bodyPr/>
+          <a:lstStyle/>
+          <a:p>
+            <a:endParaRPr lang="en-US"/>
+          </a:p>
+        </p:txBody>
+      </p:sp>
+      <p:sp>
+        <p:nvSpPr>
+          <p:cNvPr id="10" name="Text 8"/>
+          <p:cNvSpPr/>
+          <p:nvPr/>
+        </p:nvSpPr>
+        <p:spPr>
+          <a:xfrm>
+            <a:off x="502920" y="2039112"/>
+            <a:ext cx="2926080" cy="320040"/>
+          </a:xfrm>
+          <a:prstGeom prst="rect">
+            <a:avLst/>
+          </a:prstGeom>
+          <a:noFill/>
+        </p:spPr>
+        <p:txBody>
+          <a:bodyPr wrap="square" lIns="0" tIns="0" rIns="0" bIns="0" rtlCol="0" anchor="ctr"/>
+          <a:lstStyle/>
+          <a:p>
+            <a:pPr marL="0" indent="0">
+              <a:buNone/>
+            </a:pPr>
+            <a:r>
+              <a:rPr lang="en-US" sz="1300" b="1" dirty="0">
+                <a:solidFill>
+                  <a:srgbClr val="1E2761"/>
+                </a:solidFill>
+                <a:latin typeface="Consolas" pitchFamily="34" charset="0"/>
+                <a:ea typeface="Consolas" pitchFamily="34" charset="-122"/>
+                <a:cs typeface="Consolas" pitchFamily="34" charset="-120"/>
+              </a:rPr>
+              <a:t>criterion = 'gini'</a:t>
+            </a:r>
+            <a:endParaRPr lang="en-US" sz="1300" dirty="0"/>
+          </a:p>
+        </p:txBody>
+      </p:sp>
+      <p:sp>
+        <p:nvSpPr>
+          <p:cNvPr id="11" name="Text 9"/>
+          <p:cNvSpPr/>
+          <p:nvPr/>
+        </p:nvSpPr>
+        <p:spPr>
+          <a:xfrm>
+            <a:off x="502920" y="2404872"/>
+            <a:ext cx="8138160" cy="347472"/>
+          </a:xfrm>
+          <a:prstGeom prst="rect">
+            <a:avLst/>
+          </a:prstGeom>
+          <a:noFill/>
+        </p:spPr>
+        <p:txBody>
+          <a:bodyPr wrap="square" lIns="0" tIns="0" rIns="0" bIns="0" rtlCol="0" anchor="ctr"/>
+          <a:lstStyle/>
+          <a:p>
+            <a:pPr marL="0" indent="0">
+              <a:buNone/>
+            </a:pPr>
+            <a:r>
+              <a:rPr lang="en-US" sz="1150" dirty="0">
+                <a:solidFill>
+                  <a:srgbClr val="1E2761"/>
+                </a:solidFill>
+                <a:latin typeface="Calibri" pitchFamily="34" charset="0"/>
+                <a:ea typeface="Calibri" pitchFamily="34" charset="-122"/>
+                <a:cs typeface="Calibri" pitchFamily="34" charset="-120"/>
+              </a:rPr>
+              <a:t>Gini impurity measures how often a randomly chosen element would be misclassified. Default and effective split criterion for churn classification tasks.</a:t>
+            </a:r>
+            <a:endParaRPr lang="en-US" sz="1150" dirty="0"/>
+          </a:p>
+        </p:txBody>
+      </p:sp>
+      <p:sp>
+        <p:nvSpPr>
+          <p:cNvPr id="12" name="Shape 10"/>
+          <p:cNvSpPr/>
+          <p:nvPr/>
+        </p:nvSpPr>
+        <p:spPr>
+          <a:xfrm>
+            <a:off x="274320" y="2971800"/>
+            <a:ext cx="8595360" cy="841248"/>
+          </a:xfrm>
+          <a:prstGeom prst="rect">
+            <a:avLst/>
+          </a:prstGeom>
+          <a:solidFill>
+            <a:srgbClr val="FFFFFF"/>
+          </a:solidFill>
+          <a:ln w="12700">
+            <a:solidFill>
+              <a:srgbClr val="E2E8F0"/>
+            </a:solidFill>
+            <a:prstDash val="solid"/>
+          </a:ln>
+          <a:effectLst>
+            <a:outerShdw blurRad="101600" dist="38100" dir="8100000" algn="bl" rotWithShape="0">
+              <a:srgbClr val="000000">
+                <a:alpha val="12000"/>
+              </a:srgbClr>
+            </a:outerShdw>
+          </a:effectLst>
+        </p:spPr>
+        <p:txBody>
+          <a:bodyPr/>
+          <a:lstStyle/>
+          <a:p>
+            <a:endParaRPr lang="en-US"/>
+          </a:p>
+        </p:txBody>
+      </p:sp>
+      <p:sp>
+        <p:nvSpPr>
+          <p:cNvPr id="13" name="Shape 11"/>
+          <p:cNvSpPr/>
+          <p:nvPr/>
+        </p:nvSpPr>
+        <p:spPr>
+          <a:xfrm>
+            <a:off x="274320" y="2971800"/>
+            <a:ext cx="64008" cy="841248"/>
+          </a:xfrm>
+          <a:prstGeom prst="rect">
+            <a:avLst/>
+          </a:prstGeom>
+          <a:solidFill>
+            <a:srgbClr val="0891B2"/>
+          </a:solidFill>
+          <a:ln w="12700">
+            <a:solidFill>
+              <a:srgbClr val="0891B2"/>
+            </a:solidFill>
+            <a:prstDash val="solid"/>
+          </a:ln>
+        </p:spPr>
+        <p:txBody>
+          <a:bodyPr/>
+          <a:lstStyle/>
+          <a:p>
+            <a:endParaRPr lang="en-US"/>
+          </a:p>
+        </p:txBody>
+      </p:sp>
+      <p:sp>
+        <p:nvSpPr>
+          <p:cNvPr id="14" name="Text 12"/>
+          <p:cNvSpPr/>
+          <p:nvPr/>
+        </p:nvSpPr>
+        <p:spPr>
+          <a:xfrm>
+            <a:off x="502920" y="3044952"/>
+            <a:ext cx="2926080" cy="320040"/>
+          </a:xfrm>
+          <a:prstGeom prst="rect">
+            <a:avLst/>
+          </a:prstGeom>
+          <a:noFill/>
+        </p:spPr>
+        <p:txBody>
+          <a:bodyPr wrap="square" lIns="0" tIns="0" rIns="0" bIns="0" rtlCol="0" anchor="ctr"/>
+          <a:lstStyle/>
+          <a:p>
+            <a:pPr marL="0" indent="0">
+              <a:buNone/>
+            </a:pPr>
+            <a:r>
+              <a:rPr lang="en-US" sz="1300" b="1" dirty="0">
+                <a:solidFill>
+                  <a:srgbClr val="1E2761"/>
+                </a:solidFill>
+                <a:latin typeface="Consolas" pitchFamily="34" charset="0"/>
+                <a:ea typeface="Consolas" pitchFamily="34" charset="-122"/>
+                <a:cs typeface="Consolas" pitchFamily="34" charset="-120"/>
+              </a:rPr>
+              <a:t>random_state = 42</a:t>
+            </a:r>
+            <a:endParaRPr lang="en-US" sz="1300" dirty="0"/>
+          </a:p>
+        </p:txBody>
+      </p:sp>
+      <p:sp>
+        <p:nvSpPr>
+          <p:cNvPr id="15" name="Text 13"/>
+          <p:cNvSpPr/>
+          <p:nvPr/>
+        </p:nvSpPr>
+        <p:spPr>
+          <a:xfrm>
+            <a:off x="502920" y="3410712"/>
+            <a:ext cx="8138160" cy="347472"/>
+          </a:xfrm>
+          <a:prstGeom prst="rect">
+            <a:avLst/>
+          </a:prstGeom>
+          <a:noFill/>
+        </p:spPr>
+        <p:txBody>
+          <a:bodyPr wrap="square" lIns="0" tIns="0" rIns="0" bIns="0" rtlCol="0" anchor="ctr"/>
+          <a:lstStyle/>
+          <a:p>
+            <a:pPr marL="0" indent="0">
+              <a:buNone/>
+            </a:pPr>
+            <a:r>
+              <a:rPr lang="en-US" sz="1150" dirty="0">
+                <a:solidFill>
+                  <a:srgbClr val="1E2761"/>
+                </a:solidFill>
+                <a:latin typeface="Calibri" pitchFamily="34" charset="0"/>
+                <a:ea typeface="Calibri" pitchFamily="34" charset="-122"/>
+                <a:cs typeface="Calibri" pitchFamily="34" charset="-120"/>
+              </a:rPr>
+              <a:t>Ensures reproducibility. Every team member gets identical results when re-running the notebook — critical for a group project.</a:t>
+            </a:r>
+            <a:endParaRPr lang="en-US" sz="1150" dirty="0"/>
+          </a:p>
+        </p:txBody>
+      </p:sp>
+      <p:sp>
+        <p:nvSpPr>
+          <p:cNvPr id="16" name="Shape 14"/>
+          <p:cNvSpPr/>
+          <p:nvPr/>
+        </p:nvSpPr>
+        <p:spPr>
+          <a:xfrm>
+            <a:off x="274320" y="3977640"/>
+            <a:ext cx="8595360" cy="841248"/>
+          </a:xfrm>
+          <a:prstGeom prst="rect">
+            <a:avLst/>
+          </a:prstGeom>
+          <a:solidFill>
+            <a:srgbClr val="1E2761"/>
+          </a:solidFill>
+          <a:ln>
+            <a:noFill/>
+          </a:ln>
+          <a:effectLst>
+            <a:outerShdw blurRad="101600" dist="38100" dir="8100000" algn="bl" rotWithShape="0">
+              <a:srgbClr val="000000">
+                <a:alpha val="12000"/>
+              </a:srgbClr>
+            </a:outerShdw>
+          </a:effectLst>
+        </p:spPr>
+        <p:txBody>
+          <a:bodyPr/>
+          <a:lstStyle/>
+          <a:p>
+            <a:endParaRPr lang="en-US"/>
+          </a:p>
+        </p:txBody>
+      </p:sp>
+      <p:sp>
+        <p:nvSpPr>
+          <p:cNvPr id="17" name="Shape 15"/>
+          <p:cNvSpPr/>
+          <p:nvPr/>
+        </p:nvSpPr>
+        <p:spPr>
+          <a:xfrm>
+            <a:off x="274320" y="3977640"/>
+            <a:ext cx="64008" cy="841248"/>
+          </a:xfrm>
+          <a:prstGeom prst="rect">
+            <a:avLst/>
+          </a:prstGeom>
+          <a:solidFill>
+            <a:srgbClr val="0891B2"/>
+          </a:solidFill>
+          <a:ln w="12700">
+            <a:solidFill>
+              <a:srgbClr val="0891B2"/>
+            </a:solidFill>
+            <a:prstDash val="solid"/>
+          </a:ln>
+        </p:spPr>
+        <p:txBody>
+          <a:bodyPr/>
+          <a:lstStyle/>
+          <a:p>
+            <a:endParaRPr lang="en-US"/>
+          </a:p>
+        </p:txBody>
+      </p:sp>
+      <p:sp>
+        <p:nvSpPr>
+          <p:cNvPr id="18" name="Text 16"/>
+          <p:cNvSpPr/>
+          <p:nvPr/>
+        </p:nvSpPr>
+        <p:spPr>
+          <a:xfrm>
+            <a:off x="502920" y="4050792"/>
+            <a:ext cx="2926080" cy="320040"/>
+          </a:xfrm>
+          <a:prstGeom prst="rect">
+            <a:avLst/>
+          </a:prstGeom>
+          <a:noFill/>
+        </p:spPr>
+        <p:txBody>
+          <a:bodyPr wrap="square" lIns="0" tIns="0" rIns="0" bIns="0" rtlCol="0" anchor="ctr"/>
+          <a:lstStyle/>
+          <a:p>
+            <a:pPr marL="0" indent="0">
+              <a:buNone/>
+            </a:pPr>
+            <a:r>
+              <a:rPr lang="en-US" sz="1300" b="1" dirty="0">
+                <a:solidFill>
+                  <a:srgbClr val="1E2761"/>
+                </a:solidFill>
+                <a:latin typeface="Consolas" pitchFamily="34" charset="0"/>
+                <a:ea typeface="Consolas" pitchFamily="34" charset="-122"/>
+                <a:cs typeface="Consolas" pitchFamily="34" charset="-120"/>
+              </a:rPr>
+              <a:t>StandardScaler (preprocessing)</a:t>
+            </a:r>
+            <a:endParaRPr lang="en-US" sz="1300" dirty="0"/>
+          </a:p>
+        </p:txBody>
+      </p:sp>
+      <p:sp>
+        <p:nvSpPr>
+          <p:cNvPr id="19" name="Text 17"/>
+          <p:cNvSpPr/>
+          <p:nvPr/>
+        </p:nvSpPr>
+        <p:spPr>
+          <a:xfrm>
+            <a:off x="502920" y="4416552"/>
+            <a:ext cx="8138160" cy="347472"/>
+          </a:xfrm>
+          <a:prstGeom prst="rect">
+            <a:avLst/>
+          </a:prstGeom>
+          <a:solidFill>
+            <a:srgbClr val="1E2761"/>
+          </a:solidFill>
+          <a:ln>
+            <a:noFill/>
+          </a:ln>
+        </p:spPr>
+        <p:txBody>
+          <a:bodyPr wrap="square" lIns="0" tIns="0" rIns="0" bIns="0" rtlCol="0" anchor="ctr"/>
+          <a:lstStyle/>
+          <a:p>
+            <a:pPr marL="0" indent="0">
+              <a:buNone/>
+            </a:pPr>
+            <a:r>
+              <a:rPr lang="en-US" sz="1150" dirty="0">
+                <a:solidFill>
+                  <a:srgbClr val="FFFFFF"/>
+                </a:solidFill>
+                <a:latin typeface="Calibri" pitchFamily="34" charset="0"/>
+                <a:ea typeface="Calibri" pitchFamily="34" charset="-122"/>
+                <a:cs typeface="Calibri" pitchFamily="34" charset="-120"/>
+              </a:rPr>
+              <a:t>Applied for consistency across the pipeline. While Random Forest is tree-based and scale-invariant, scaling was used to standardise all models.</a:t>
+            </a:r>
+            <a:endParaRPr lang="en-US" sz="1150" dirty="0"/>
+          </a:p>
+        </p:txBody>
+      </p:sp>
+    </p:spTree>
+  </p:cSld>
+  <p:clrMapOvr>
+    <a:masterClrMapping/>
+  </p:clrMapOvr>
+</p:sld>
+</file>
+
+<file path=ppt/slides/slide44.xml><?xml version="1.0" encoding="utf-8"?>
+<p:sld xmlns:a="http://schemas.openxmlformats.org/drawingml/2006/main" xmlns:r="http://schemas.openxmlformats.org/officeDocument/2006/relationships" xmlns:p="http://schemas.openxmlformats.org/presentationml/2006/main">
+  <p:cSld>
+    <p:bg>
+      <p:bgPr>
+        <a:solidFill>
+          <a:srgbClr val="FFFFFF"/>
+        </a:solidFill>
+        <a:effectLst/>
+      </p:bgPr>
+    </p:bg>
+    <p:spTree>
+      <p:nvGrpSpPr>
+        <p:cNvPr id="1" name=""/>
+        <p:cNvGrpSpPr/>
+        <p:nvPr/>
+      </p:nvGrpSpPr>
+      <p:grpSpPr>
+        <a:xfrm>
+          <a:off x="0" y="0"/>
+          <a:ext cx="0" cy="0"/>
+          <a:chOff x="0" y="0"/>
+          <a:chExt cx="0" cy="0"/>
+        </a:xfrm>
+      </p:grpSpPr>
+      <p:sp>
+        <p:nvSpPr>
+          <p:cNvPr id="2" name="Shape 0"/>
+          <p:cNvSpPr/>
+          <p:nvPr/>
+        </p:nvSpPr>
+        <p:spPr>
+          <a:xfrm>
+            <a:off x="0" y="0"/>
+            <a:ext cx="9144000" cy="822960"/>
+          </a:xfrm>
+          <a:prstGeom prst="rect">
+            <a:avLst/>
+          </a:prstGeom>
+          <a:solidFill>
+            <a:srgbClr val="1E2761"/>
+          </a:solidFill>
+          <a:ln>
+            <a:noFill/>
+          </a:ln>
+        </p:spPr>
+        <p:txBody>
+          <a:bodyPr/>
+          <a:lstStyle/>
+          <a:p>
+            <a:endParaRPr lang="en-US"/>
+          </a:p>
+        </p:txBody>
+      </p:sp>
+      <p:sp>
+        <p:nvSpPr>
+          <p:cNvPr id="3" name="Text 1"/>
+          <p:cNvSpPr/>
+          <p:nvPr/>
+        </p:nvSpPr>
+        <p:spPr>
+          <a:xfrm>
+            <a:off x="365760" y="91440"/>
+            <a:ext cx="8229600" cy="640080"/>
+          </a:xfrm>
+          <a:prstGeom prst="rect">
+            <a:avLst/>
+          </a:prstGeom>
+          <a:solidFill>
+            <a:srgbClr val="1E2761"/>
+          </a:solidFill>
+          <a:ln>
+            <a:noFill/>
+          </a:ln>
+        </p:spPr>
+        <p:txBody>
+          <a:bodyPr wrap="square" lIns="0" tIns="0" rIns="0" bIns="0" rtlCol="0" anchor="ctr"/>
+          <a:lstStyle/>
+          <a:p>
+            <a:pPr marL="0" indent="0">
+              <a:buNone/>
+            </a:pPr>
+            <a:r>
+              <a:rPr lang="en-US" sz="2800" b="1" dirty="0">
+                <a:solidFill>
+                  <a:srgbClr val="FFFFFF"/>
+                </a:solidFill>
+                <a:latin typeface="Calibri" pitchFamily="34" charset="0"/>
+                <a:ea typeface="Calibri" pitchFamily="34" charset="-122"/>
+                <a:cs typeface="Calibri" pitchFamily="34" charset="-120"/>
+              </a:rPr>
+              <a:t>Model Results</a:t>
+            </a:r>
+            <a:endParaRPr lang="en-US" sz="2800" dirty="0"/>
+          </a:p>
+        </p:txBody>
+      </p:sp>
+      <p:sp>
+        <p:nvSpPr>
+          <p:cNvPr id="4" name="Shape 2"/>
+          <p:cNvSpPr/>
+          <p:nvPr/>
+        </p:nvSpPr>
+        <p:spPr>
+          <a:xfrm>
+            <a:off x="228600" y="960120"/>
+            <a:ext cx="1051560" cy="1463040"/>
+          </a:xfrm>
+          <a:prstGeom prst="rect">
+            <a:avLst/>
+          </a:prstGeom>
+          <a:solidFill>
+            <a:srgbClr val="EEF2F7"/>
+          </a:solidFill>
+          <a:ln>
+            <a:noFill/>
+          </a:ln>
+          <a:effectLst>
+            <a:outerShdw blurRad="101600" dist="38100" dir="8100000" algn="bl" rotWithShape="0">
+              <a:srgbClr val="000000">
+                <a:alpha val="12000"/>
+              </a:srgbClr>
+            </a:outerShdw>
+          </a:effectLst>
+        </p:spPr>
+        <p:txBody>
+          <a:bodyPr/>
+          <a:lstStyle/>
+          <a:p>
+            <a:endParaRPr lang="en-US"/>
+          </a:p>
+        </p:txBody>
+      </p:sp>
+      <p:sp>
+        <p:nvSpPr>
+          <p:cNvPr id="5" name="Text 3"/>
+          <p:cNvSpPr/>
+          <p:nvPr/>
+        </p:nvSpPr>
+        <p:spPr>
+          <a:xfrm>
+            <a:off x="228600" y="1097280"/>
+            <a:ext cx="1051560" cy="640080"/>
+          </a:xfrm>
+          <a:prstGeom prst="rect">
+            <a:avLst/>
+          </a:prstGeom>
+          <a:noFill/>
+        </p:spPr>
+        <p:txBody>
+          <a:bodyPr wrap="square" lIns="0" tIns="0" rIns="0" bIns="0" rtlCol="0" anchor="ctr"/>
+          <a:lstStyle/>
+          <a:p>
+            <a:pPr marL="0" indent="0" algn="ctr">
+              <a:buNone/>
+            </a:pPr>
+            <a:r>
+              <a:rPr lang="en-US" sz="2200" b="1" dirty="0">
+                <a:solidFill>
+                  <a:srgbClr val="1E2761"/>
+                </a:solidFill>
+                <a:latin typeface="Calibri" pitchFamily="34" charset="0"/>
+                <a:ea typeface="Calibri" pitchFamily="34" charset="-122"/>
+                <a:cs typeface="Calibri" pitchFamily="34" charset="-120"/>
+              </a:rPr>
+              <a:t>93.1%</a:t>
+            </a:r>
+            <a:endParaRPr lang="en-US" sz="2200" dirty="0"/>
+          </a:p>
+        </p:txBody>
+      </p:sp>
+      <p:sp>
+        <p:nvSpPr>
+          <p:cNvPr id="6" name="Text 4"/>
+          <p:cNvSpPr/>
+          <p:nvPr/>
+        </p:nvSpPr>
+        <p:spPr>
+          <a:xfrm>
+            <a:off x="228600" y="1828800"/>
+            <a:ext cx="1051560" cy="457200"/>
+          </a:xfrm>
+          <a:prstGeom prst="rect">
+            <a:avLst/>
+          </a:prstGeom>
+          <a:noFill/>
+        </p:spPr>
+        <p:txBody>
+          <a:bodyPr wrap="square" lIns="0" tIns="0" rIns="0" bIns="0" rtlCol="0" anchor="ctr"/>
+          <a:lstStyle/>
+          <a:p>
+            <a:pPr marL="0" indent="0" algn="ctr">
+              <a:buNone/>
+            </a:pPr>
+            <a:r>
+              <a:rPr lang="en-US" sz="900" dirty="0">
+                <a:solidFill>
+                  <a:srgbClr val="FFFFFF"/>
+                </a:solidFill>
+                <a:latin typeface="Calibri" pitchFamily="34" charset="0"/>
+                <a:ea typeface="Calibri" pitchFamily="34" charset="-122"/>
+                <a:cs typeface="Calibri" pitchFamily="34" charset="-120"/>
+              </a:rPr>
+              <a:t>Overall Accuracy</a:t>
+            </a:r>
+            <a:endParaRPr lang="en-US" sz="900" dirty="0"/>
+          </a:p>
+        </p:txBody>
+      </p:sp>
+      <p:sp>
+        <p:nvSpPr>
+          <p:cNvPr id="7" name="Shape 5"/>
+          <p:cNvSpPr/>
+          <p:nvPr/>
+        </p:nvSpPr>
+        <p:spPr>
+          <a:xfrm>
+            <a:off x="1399032" y="960120"/>
+            <a:ext cx="1051560" cy="1463040"/>
+          </a:xfrm>
+          <a:prstGeom prst="rect">
+            <a:avLst/>
+          </a:prstGeom>
+          <a:solidFill>
+            <a:srgbClr val="EEF2F7"/>
+          </a:solidFill>
+          <a:ln>
+            <a:noFill/>
+          </a:ln>
+          <a:effectLst>
+            <a:outerShdw blurRad="101600" dist="38100" dir="8100000" algn="bl" rotWithShape="0">
+              <a:srgbClr val="000000">
+                <a:alpha val="12000"/>
+              </a:srgbClr>
+            </a:outerShdw>
+          </a:effectLst>
+        </p:spPr>
+        <p:txBody>
+          <a:bodyPr/>
+          <a:lstStyle/>
+          <a:p>
+            <a:endParaRPr lang="en-US"/>
+          </a:p>
+        </p:txBody>
+      </p:sp>
+      <p:sp>
+        <p:nvSpPr>
+          <p:cNvPr id="8" name="Text 6"/>
+          <p:cNvSpPr/>
+          <p:nvPr/>
+        </p:nvSpPr>
+        <p:spPr>
+          <a:xfrm>
+            <a:off x="1399032" y="1097280"/>
+            <a:ext cx="1051560" cy="640080"/>
+          </a:xfrm>
+          <a:prstGeom prst="rect">
+            <a:avLst/>
+          </a:prstGeom>
+          <a:noFill/>
+        </p:spPr>
+        <p:txBody>
+          <a:bodyPr wrap="square" lIns="0" tIns="0" rIns="0" bIns="0" rtlCol="0" anchor="ctr"/>
+          <a:lstStyle/>
+          <a:p>
+            <a:pPr marL="0" indent="0" algn="ctr">
+              <a:buNone/>
+            </a:pPr>
+            <a:r>
+              <a:rPr lang="en-US" sz="2200" b="1" dirty="0">
+                <a:solidFill>
+                  <a:srgbClr val="1E2761"/>
+                </a:solidFill>
+                <a:latin typeface="Calibri" pitchFamily="34" charset="0"/>
+                <a:ea typeface="Calibri" pitchFamily="34" charset="-122"/>
+                <a:cs typeface="Calibri" pitchFamily="34" charset="-120"/>
+              </a:rPr>
+              <a:t>72%</a:t>
+            </a:r>
+            <a:endParaRPr lang="en-US" sz="2200" dirty="0"/>
+          </a:p>
+        </p:txBody>
+      </p:sp>
+      <p:sp>
+        <p:nvSpPr>
+          <p:cNvPr id="9" name="Text 7"/>
+          <p:cNvSpPr/>
+          <p:nvPr/>
+        </p:nvSpPr>
+        <p:spPr>
+          <a:xfrm>
+            <a:off x="1399032" y="1828800"/>
+            <a:ext cx="1051560" cy="457200"/>
+          </a:xfrm>
+          <a:prstGeom prst="rect">
+            <a:avLst/>
+          </a:prstGeom>
+          <a:noFill/>
+        </p:spPr>
+        <p:txBody>
+          <a:bodyPr wrap="square" lIns="0" tIns="0" rIns="0" bIns="0" rtlCol="0" anchor="ctr"/>
+          <a:lstStyle/>
+          <a:p>
+            <a:pPr marL="0" indent="0" algn="ctr">
+              <a:buNone/>
+            </a:pPr>
+            <a:r>
+              <a:rPr lang="en-US" sz="900" dirty="0">
+                <a:solidFill>
+                  <a:srgbClr val="FFFFFF"/>
+                </a:solidFill>
+                <a:latin typeface="Calibri" pitchFamily="34" charset="0"/>
+                <a:ea typeface="Calibri" pitchFamily="34" charset="-122"/>
+                <a:cs typeface="Calibri" pitchFamily="34" charset="-120"/>
+              </a:rPr>
+              <a:t>Churn Recall</a:t>
+            </a:r>
+            <a:endParaRPr lang="en-US" sz="900" dirty="0"/>
+          </a:p>
+        </p:txBody>
+      </p:sp>
+      <p:sp>
+        <p:nvSpPr>
+          <p:cNvPr id="10" name="Shape 8"/>
+          <p:cNvSpPr/>
+          <p:nvPr/>
+        </p:nvSpPr>
+        <p:spPr>
+          <a:xfrm>
+            <a:off x="2569464" y="960120"/>
+            <a:ext cx="1051560" cy="1463040"/>
+          </a:xfrm>
+          <a:prstGeom prst="rect">
+            <a:avLst/>
+          </a:prstGeom>
+          <a:solidFill>
+            <a:srgbClr val="EEF2F7"/>
+          </a:solidFill>
+          <a:ln>
+            <a:noFill/>
+          </a:ln>
+          <a:effectLst>
+            <a:outerShdw blurRad="101600" dist="38100" dir="8100000" algn="bl" rotWithShape="0">
+              <a:srgbClr val="000000">
+                <a:alpha val="12000"/>
+              </a:srgbClr>
+            </a:outerShdw>
+          </a:effectLst>
+        </p:spPr>
+        <p:txBody>
+          <a:bodyPr/>
+          <a:lstStyle/>
+          <a:p>
+            <a:endParaRPr lang="en-US"/>
+          </a:p>
+        </p:txBody>
+      </p:sp>
+      <p:sp>
+        <p:nvSpPr>
+          <p:cNvPr id="11" name="Text 9"/>
+          <p:cNvSpPr/>
+          <p:nvPr/>
+        </p:nvSpPr>
+        <p:spPr>
+          <a:xfrm>
+            <a:off x="2569464" y="1097280"/>
+            <a:ext cx="1051560" cy="640080"/>
+          </a:xfrm>
+          <a:prstGeom prst="rect">
+            <a:avLst/>
+          </a:prstGeom>
+          <a:noFill/>
+        </p:spPr>
+        <p:txBody>
+          <a:bodyPr wrap="square" lIns="0" tIns="0" rIns="0" bIns="0" rtlCol="0" anchor="ctr"/>
+          <a:lstStyle/>
+          <a:p>
+            <a:pPr marL="0" indent="0" algn="ctr">
+              <a:buNone/>
+            </a:pPr>
+            <a:r>
+              <a:rPr lang="en-US" sz="2200" b="1" dirty="0">
+                <a:solidFill>
+                  <a:srgbClr val="1E2761"/>
+                </a:solidFill>
+                <a:latin typeface="Calibri" pitchFamily="34" charset="0"/>
+                <a:ea typeface="Calibri" pitchFamily="34" charset="-122"/>
+                <a:cs typeface="Calibri" pitchFamily="34" charset="-120"/>
+              </a:rPr>
+              <a:t>68%</a:t>
+            </a:r>
+            <a:endParaRPr lang="en-US" sz="2200" dirty="0"/>
+          </a:p>
+        </p:txBody>
+      </p:sp>
+      <p:sp>
+        <p:nvSpPr>
+          <p:cNvPr id="12" name="Text 10"/>
+          <p:cNvSpPr/>
+          <p:nvPr/>
+        </p:nvSpPr>
+        <p:spPr>
+          <a:xfrm>
+            <a:off x="2569464" y="1828800"/>
+            <a:ext cx="1051560" cy="457200"/>
+          </a:xfrm>
+          <a:prstGeom prst="rect">
+            <a:avLst/>
+          </a:prstGeom>
+          <a:noFill/>
+        </p:spPr>
+        <p:txBody>
+          <a:bodyPr wrap="square" lIns="0" tIns="0" rIns="0" bIns="0" rtlCol="0" anchor="ctr"/>
+          <a:lstStyle/>
+          <a:p>
+            <a:pPr marL="0" indent="0" algn="ctr">
+              <a:buNone/>
+            </a:pPr>
+            <a:r>
+              <a:rPr lang="en-US" sz="900" dirty="0">
+                <a:solidFill>
+                  <a:srgbClr val="FFFFFF"/>
+                </a:solidFill>
+                <a:latin typeface="Calibri" pitchFamily="34" charset="0"/>
+                <a:ea typeface="Calibri" pitchFamily="34" charset="-122"/>
+                <a:cs typeface="Calibri" pitchFamily="34" charset="-120"/>
+              </a:rPr>
+              <a:t>Churn Precision</a:t>
+            </a:r>
+            <a:endParaRPr lang="en-US" sz="900" dirty="0"/>
+          </a:p>
+        </p:txBody>
+      </p:sp>
+      <p:sp>
+        <p:nvSpPr>
+          <p:cNvPr id="13" name="Shape 11"/>
+          <p:cNvSpPr/>
+          <p:nvPr/>
+        </p:nvSpPr>
+        <p:spPr>
+          <a:xfrm>
+            <a:off x="3739896" y="960120"/>
+            <a:ext cx="1051560" cy="1463040"/>
+          </a:xfrm>
+          <a:prstGeom prst="rect">
+            <a:avLst/>
+          </a:prstGeom>
+          <a:solidFill>
+            <a:srgbClr val="EEF2F7"/>
+          </a:solidFill>
+          <a:ln>
+            <a:noFill/>
+          </a:ln>
+          <a:effectLst>
+            <a:outerShdw blurRad="101600" dist="38100" dir="8100000" algn="bl" rotWithShape="0">
+              <a:srgbClr val="000000">
+                <a:alpha val="12000"/>
+              </a:srgbClr>
+            </a:outerShdw>
+          </a:effectLst>
+        </p:spPr>
+        <p:txBody>
+          <a:bodyPr/>
+          <a:lstStyle/>
+          <a:p>
+            <a:endParaRPr lang="en-US"/>
+          </a:p>
+        </p:txBody>
+      </p:sp>
+      <p:sp>
+        <p:nvSpPr>
+          <p:cNvPr id="14" name="Text 12"/>
+          <p:cNvSpPr/>
+          <p:nvPr/>
+        </p:nvSpPr>
+        <p:spPr>
+          <a:xfrm>
+            <a:off x="3739896" y="1097280"/>
+            <a:ext cx="1051560" cy="640080"/>
+          </a:xfrm>
+          <a:prstGeom prst="rect">
+            <a:avLst/>
+          </a:prstGeom>
+          <a:noFill/>
+        </p:spPr>
+        <p:txBody>
+          <a:bodyPr wrap="square" lIns="0" tIns="0" rIns="0" bIns="0" rtlCol="0" anchor="ctr"/>
+          <a:lstStyle/>
+          <a:p>
+            <a:pPr marL="0" indent="0" algn="ctr">
+              <a:buNone/>
+            </a:pPr>
+            <a:r>
+              <a:rPr lang="en-US" sz="2200" b="1" dirty="0">
+                <a:solidFill>
+                  <a:srgbClr val="1E2761"/>
+                </a:solidFill>
+                <a:latin typeface="Calibri" pitchFamily="34" charset="0"/>
+                <a:ea typeface="Calibri" pitchFamily="34" charset="-122"/>
+                <a:cs typeface="Calibri" pitchFamily="34" charset="-120"/>
+              </a:rPr>
+              <a:t>0.69</a:t>
+            </a:r>
+            <a:endParaRPr lang="en-US" sz="2200" dirty="0"/>
+          </a:p>
+        </p:txBody>
+      </p:sp>
+      <p:sp>
+        <p:nvSpPr>
+          <p:cNvPr id="15" name="Text 13"/>
+          <p:cNvSpPr/>
+          <p:nvPr/>
+        </p:nvSpPr>
+        <p:spPr>
+          <a:xfrm>
+            <a:off x="3739896" y="1828800"/>
+            <a:ext cx="1051560" cy="457200"/>
+          </a:xfrm>
+          <a:prstGeom prst="rect">
+            <a:avLst/>
+          </a:prstGeom>
+          <a:noFill/>
+        </p:spPr>
+        <p:txBody>
+          <a:bodyPr wrap="square" lIns="0" tIns="0" rIns="0" bIns="0" rtlCol="0" anchor="ctr"/>
+          <a:lstStyle/>
+          <a:p>
+            <a:pPr marL="0" indent="0" algn="ctr">
+              <a:buNone/>
+            </a:pPr>
+            <a:r>
+              <a:rPr lang="en-US" sz="900" dirty="0">
+                <a:solidFill>
+                  <a:srgbClr val="FFFFFF"/>
+                </a:solidFill>
+                <a:latin typeface="Calibri" pitchFamily="34" charset="0"/>
+                <a:ea typeface="Calibri" pitchFamily="34" charset="-122"/>
+                <a:cs typeface="Calibri" pitchFamily="34" charset="-120"/>
+              </a:rPr>
+              <a:t>F1 Score (Churn)</a:t>
+            </a:r>
+            <a:endParaRPr lang="en-US" sz="900" dirty="0"/>
+          </a:p>
+        </p:txBody>
+      </p:sp>
+      <p:sp>
+        <p:nvSpPr>
+          <p:cNvPr id="16" name="Text 14"/>
+          <p:cNvSpPr/>
+          <p:nvPr/>
+        </p:nvSpPr>
+        <p:spPr>
+          <a:xfrm>
+            <a:off x="274320" y="2606040"/>
+            <a:ext cx="4114800" cy="320040"/>
+          </a:xfrm>
+          <a:prstGeom prst="rect">
+            <a:avLst/>
+          </a:prstGeom>
+          <a:noFill/>
+        </p:spPr>
+        <p:txBody>
+          <a:bodyPr wrap="square" lIns="0" tIns="0" rIns="0" bIns="0" rtlCol="0" anchor="ctr"/>
+          <a:lstStyle/>
+          <a:p>
+            <a:pPr marL="0" indent="0">
+              <a:buNone/>
+            </a:pPr>
+            <a:r>
+              <a:rPr lang="en-US" sz="1400" b="1" dirty="0">
+                <a:solidFill>
+                  <a:srgbClr val="1E2761"/>
+                </a:solidFill>
+                <a:latin typeface="Calibri" pitchFamily="34" charset="0"/>
+                <a:ea typeface="Calibri" pitchFamily="34" charset="-122"/>
+                <a:cs typeface="Calibri" pitchFamily="34" charset="-120"/>
+              </a:rPr>
+              <a:t>Confusion Matrix</a:t>
+            </a:r>
+            <a:endParaRPr lang="en-US" sz="1400" dirty="0"/>
+          </a:p>
+        </p:txBody>
+      </p:sp>
+      <p:graphicFrame>
+        <p:nvGraphicFramePr>
+          <p:cNvPr id="17" name="Table 0"/>
+          <p:cNvGraphicFramePr>
+            <a:graphicFrameLocks noGrp="1"/>
+          </p:cNvGraphicFramePr>
+          <p:nvPr/>
+        </p:nvGraphicFramePr>
+        <p:xfrm>
+          <a:off x="274320" y="2971800"/>
+          <a:ext cx="4572000" cy="1920240"/>
+        </p:xfrm>
+        <a:graphic>
+          <a:graphicData uri="http://schemas.openxmlformats.org/drawingml/2006/table">
+            <a:tbl>
+              <a:tblPr/>
+              <a:tblGrid>
+                <a:gridCol w="1463040"/>
+                <a:gridCol w="1554480"/>
+                <a:gridCol w="1554480"/>
+              </a:tblGrid>
+              <a:tr h="640080">
+                <a:tc>
+                  <a:txBody>
+                    <a:bodyPr/>
+                    <a:lstStyle/>
+                    <a:p>
+                      <a:pPr marL="0" indent="0" algn="ctr">
+                        <a:buNone/>
+                      </a:pPr>
+                      <a:endParaRPr lang="en-US" sz="1000" dirty="0"/>
+                    </a:p>
+                  </a:txBody>
+                  <a:tcPr anchor="ctr">
+                    <a:lnL w="0" cap="flat" cmpd="sng" algn="ctr">
+                      <a:noFill/>
+                    </a:lnL>
+                    <a:lnR w="0" cap="flat" cmpd="sng" algn="ctr">
+                      <a:noFill/>
+                    </a:lnR>
+                    <a:lnT w="0" cap="flat" cmpd="sng" algn="ctr">
+                      <a:noFill/>
+                    </a:lnT>
+                    <a:lnB w="0" cap="flat" cmpd="sng" algn="ctr">
+                      <a:noFill/>
+                    </a:lnB>
+                    <a:solidFill>
+                      <a:srgbClr val="1E2761"/>
+                    </a:solidFill>
+                  </a:tcPr>
+                </a:tc>
+                <a:tc>
+                  <a:txBody>
+                    <a:bodyPr/>
+                    <a:lstStyle/>
+                    <a:p>
+                      <a:pPr marL="0" indent="0" algn="ctr">
+                        <a:buNone/>
+                      </a:pPr>
+                      <a:r>
+                        <a:rPr lang="en-US" sz="1000" b="1" dirty="0">
+                          <a:solidFill>
+                            <a:srgbClr val="FFFFFF"/>
+                          </a:solidFill>
+                        </a:rPr>
+                        <a:t>Predicted: No Churn</a:t>
+                      </a:r>
+                      <a:endParaRPr lang="en-US" sz="1000" dirty="0"/>
+                    </a:p>
+                  </a:txBody>
+                  <a:tcPr anchor="ctr">
+                    <a:lnL w="0" cap="flat" cmpd="sng" algn="ctr">
+                      <a:noFill/>
+                    </a:lnL>
+                    <a:lnR w="0" cap="flat" cmpd="sng" algn="ctr">
+                      <a:noFill/>
+                    </a:lnR>
+                    <a:lnT w="0" cap="flat" cmpd="sng" algn="ctr">
+                      <a:noFill/>
+                    </a:lnT>
+                    <a:lnB w="0" cap="flat" cmpd="sng" algn="ctr">
+                      <a:noFill/>
+                    </a:lnB>
+                    <a:solidFill>
+                      <a:srgbClr val="1E2761"/>
+                    </a:solidFill>
+                  </a:tcPr>
+                </a:tc>
+                <a:tc>
+                  <a:txBody>
+                    <a:bodyPr/>
+                    <a:lstStyle/>
+                    <a:p>
+                      <a:pPr marL="0" indent="0" algn="ctr">
+                        <a:buNone/>
+                      </a:pPr>
+                      <a:r>
+                        <a:rPr lang="en-US" sz="1000" b="1" dirty="0">
+                          <a:solidFill>
+                            <a:srgbClr val="FFFFFF"/>
+                          </a:solidFill>
+                        </a:rPr>
+                        <a:t>Predicted: Churn</a:t>
+                      </a:r>
+                      <a:endParaRPr lang="en-US" sz="1000" dirty="0"/>
+                    </a:p>
+                  </a:txBody>
+                  <a:tcPr anchor="ctr">
+                    <a:lnL w="0" cap="flat" cmpd="sng" algn="ctr">
+                      <a:noFill/>
+                    </a:lnL>
+                    <a:lnR w="0" cap="flat" cmpd="sng" algn="ctr">
+                      <a:noFill/>
+                    </a:lnR>
+                    <a:lnT w="0" cap="flat" cmpd="sng" algn="ctr">
+                      <a:noFill/>
+                    </a:lnT>
+                    <a:lnB w="0" cap="flat" cmpd="sng" algn="ctr">
+                      <a:noFill/>
+                    </a:lnB>
+                    <a:solidFill>
+                      <a:srgbClr val="1E2761"/>
+                    </a:solidFill>
+                  </a:tcPr>
+                </a:tc>
+              </a:tr>
+              <a:tr h="640080">
+                <a:tc>
+                  <a:txBody>
+                    <a:bodyPr/>
+                    <a:lstStyle/>
+                    <a:p>
+                      <a:pPr marL="0" indent="0" algn="ctr">
+                        <a:buNone/>
+                      </a:pPr>
+                      <a:r>
+                        <a:rPr lang="en-US" sz="1000" b="1" dirty="0">
+                          <a:solidFill>
+                            <a:srgbClr val="FFFFFF"/>
+                          </a:solidFill>
+                        </a:rPr>
+                        <a:t>Actual: No Churn</a:t>
+                      </a:r>
+                      <a:endParaRPr lang="en-US" sz="1000" dirty="0"/>
+                    </a:p>
+                  </a:txBody>
+                  <a:tcPr anchor="ctr">
+                    <a:lnL w="0" cap="flat" cmpd="sng" algn="ctr">
+                      <a:noFill/>
+                    </a:lnL>
+                    <a:lnR w="0" cap="flat" cmpd="sng" algn="ctr">
+                      <a:noFill/>
+                    </a:lnR>
+                    <a:lnT w="0" cap="flat" cmpd="sng" algn="ctr">
+                      <a:noFill/>
+                    </a:lnT>
+                    <a:lnB w="0" cap="flat" cmpd="sng" algn="ctr">
+                      <a:noFill/>
+                    </a:lnB>
+                    <a:solidFill>
+                      <a:srgbClr val="1E2761"/>
+                    </a:solidFill>
+                  </a:tcPr>
+                </a:tc>
+                <a:tc>
+                  <a:txBody>
+                    <a:bodyPr/>
+                    <a:lstStyle/>
+                    <a:p>
+                      <a:pPr marL="0" indent="0" algn="ctr">
+                        <a:buNone/>
+                      </a:pPr>
+                      <a:r>
+                        <a:rPr lang="en-US" sz="1600" b="1" dirty="0">
+                          <a:solidFill>
+                            <a:srgbClr val="FFFFFF"/>
+                          </a:solidFill>
+                        </a:rPr>
+                        <a:t>438</a:t>
+                      </a:r>
+                      <a:endParaRPr lang="en-US" sz="1600" dirty="0"/>
+                    </a:p>
+                  </a:txBody>
+                  <a:tcPr anchor="ctr">
+                    <a:lnL w="0" cap="flat" cmpd="sng" algn="ctr">
+                      <a:noFill/>
+                    </a:lnL>
+                    <a:lnR w="0" cap="flat" cmpd="sng" algn="ctr">
+                      <a:noFill/>
+                    </a:lnR>
+                    <a:lnT w="0" cap="flat" cmpd="sng" algn="ctr">
+                      <a:noFill/>
+                    </a:lnT>
+                    <a:lnB w="0" cap="flat" cmpd="sng" algn="ctr">
+                      <a:noFill/>
+                    </a:lnB>
+                    <a:solidFill>
+                      <a:srgbClr val="166534"/>
+                    </a:solidFill>
+                  </a:tcPr>
+                </a:tc>
+                <a:tc>
+                  <a:txBody>
+                    <a:bodyPr/>
+                    <a:lstStyle/>
+                    <a:p>
+                      <a:pPr marL="0" indent="0" algn="ctr">
+                        <a:buNone/>
+                      </a:pPr>
+                      <a:r>
+                        <a:rPr lang="en-US" sz="1600" dirty="0">
+                          <a:solidFill>
+                            <a:srgbClr val="FFFFFF"/>
+                          </a:solidFill>
+                        </a:rPr>
+                        <a:t>18</a:t>
+                      </a:r>
+                      <a:endParaRPr lang="en-US" sz="1600" dirty="0"/>
+                    </a:p>
+                  </a:txBody>
+                  <a:tcPr anchor="ctr">
+                    <a:lnL w="0" cap="flat" cmpd="sng" algn="ctr">
+                      <a:noFill/>
+                    </a:lnL>
+                    <a:lnR w="0" cap="flat" cmpd="sng" algn="ctr">
+                      <a:noFill/>
+                    </a:lnR>
+                    <a:lnT w="0" cap="flat" cmpd="sng" algn="ctr">
+                      <a:noFill/>
+                    </a:lnT>
+                    <a:lnB w="0" cap="flat" cmpd="sng" algn="ctr">
+                      <a:noFill/>
+                    </a:lnB>
+                    <a:solidFill>
+                      <a:srgbClr val="7F1D1D"/>
+                    </a:solidFill>
+                  </a:tcPr>
+                </a:tc>
+              </a:tr>
+              <a:tr h="640080">
+                <a:tc>
+                  <a:txBody>
+                    <a:bodyPr/>
+                    <a:lstStyle/>
+                    <a:p>
+                      <a:pPr marL="0" indent="0" algn="ctr">
+                        <a:buNone/>
+                      </a:pPr>
+                      <a:r>
+                        <a:rPr lang="en-US" sz="1000" b="1" dirty="0">
+                          <a:solidFill>
+                            <a:srgbClr val="FFFFFF"/>
+                          </a:solidFill>
+                        </a:rPr>
+                        <a:t>Actual: Churn</a:t>
+                      </a:r>
+                      <a:endParaRPr lang="en-US" sz="1000" dirty="0"/>
+                    </a:p>
+                  </a:txBody>
+                  <a:tcPr anchor="ctr">
+                    <a:lnL w="0" cap="flat" cmpd="sng" algn="ctr">
+                      <a:noFill/>
+                    </a:lnL>
+                    <a:lnR w="0" cap="flat" cmpd="sng" algn="ctr">
+                      <a:noFill/>
+                    </a:lnR>
+                    <a:lnT w="0" cap="flat" cmpd="sng" algn="ctr">
+                      <a:noFill/>
+                    </a:lnT>
+                    <a:lnB w="0" cap="flat" cmpd="sng" algn="ctr">
+                      <a:noFill/>
+                    </a:lnB>
+                    <a:solidFill>
+                      <a:srgbClr val="1E2761"/>
+                    </a:solidFill>
+                  </a:tcPr>
+                </a:tc>
+                <a:tc>
+                  <a:txBody>
+                    <a:bodyPr/>
+                    <a:lstStyle/>
+                    <a:p>
+                      <a:pPr marL="0" indent="0" algn="ctr">
+                        <a:buNone/>
+                      </a:pPr>
+                      <a:r>
+                        <a:rPr lang="en-US" sz="1600" dirty="0">
+                          <a:solidFill>
+                            <a:srgbClr val="FFFFFF"/>
+                          </a:solidFill>
+                        </a:rPr>
+                        <a:t>19</a:t>
+                      </a:r>
+                      <a:endParaRPr lang="en-US" sz="1600" dirty="0"/>
+                    </a:p>
+                  </a:txBody>
+                  <a:tcPr anchor="ctr">
+                    <a:lnL w="0" cap="flat" cmpd="sng" algn="ctr">
+                      <a:noFill/>
+                    </a:lnL>
+                    <a:lnR w="0" cap="flat" cmpd="sng" algn="ctr">
+                      <a:noFill/>
+                    </a:lnR>
+                    <a:lnT w="0" cap="flat" cmpd="sng" algn="ctr">
+                      <a:noFill/>
+                    </a:lnT>
+                    <a:lnB w="0" cap="flat" cmpd="sng" algn="ctr">
+                      <a:noFill/>
+                    </a:lnB>
+                    <a:solidFill>
+                      <a:srgbClr val="7F1D1D"/>
+                    </a:solidFill>
+                  </a:tcPr>
+                </a:tc>
+                <a:tc>
+                  <a:txBody>
+                    <a:bodyPr/>
+                    <a:lstStyle/>
+                    <a:p>
+                      <a:pPr marL="0" indent="0" algn="ctr">
+                        <a:buNone/>
+                      </a:pPr>
+                      <a:r>
+                        <a:rPr lang="en-US" sz="1600" b="1" dirty="0">
+                          <a:solidFill>
+                            <a:srgbClr val="FFFFFF"/>
+                          </a:solidFill>
+                        </a:rPr>
+                        <a:t>59</a:t>
+                      </a:r>
+                      <a:endParaRPr lang="en-US" sz="1600" dirty="0"/>
+                    </a:p>
+                  </a:txBody>
+                  <a:tcPr anchor="ctr">
+                    <a:lnL w="0" cap="flat" cmpd="sng" algn="ctr">
+                      <a:noFill/>
+                    </a:lnL>
+                    <a:lnR w="0" cap="flat" cmpd="sng" algn="ctr">
+                      <a:noFill/>
+                    </a:lnR>
+                    <a:lnT w="0" cap="flat" cmpd="sng" algn="ctr">
+                      <a:noFill/>
+                    </a:lnT>
+                    <a:lnB w="0" cap="flat" cmpd="sng" algn="ctr">
+                      <a:noFill/>
+                    </a:lnB>
+                    <a:solidFill>
+                      <a:srgbClr val="166534"/>
+                    </a:solidFill>
+                  </a:tcPr>
+                </a:tc>
+              </a:tr>
+            </a:tbl>
+          </a:graphicData>
+        </a:graphic>
+      </p:graphicFrame>
+      <p:graphicFrame>
+        <p:nvGraphicFramePr>
+          <p:cNvPr id="19" name="Chart 0"/>
+          <p:cNvGraphicFramePr/>
+          <p:nvPr>
+            <p:custDataLst>
+              <p:tags r:id="rId2"/>
+            </p:custDataLst>
+          </p:nvPr>
+        </p:nvGraphicFramePr>
+        <p:xfrm>
+          <a:off x="5029200" y="960120"/>
+          <a:ext cx="3840480" cy="3931920"/>
+        </p:xfrm>
+        <a:graphic>
+          <a:graphicData uri="http://schemas.openxmlformats.org/drawingml/2006/chart">
+            <c:chart xmlns:c="http://schemas.openxmlformats.org/drawingml/2006/chart" xmlns:r="http://schemas.openxmlformats.org/officeDocument/2006/relationships" r:id="rId1"/>
+          </a:graphicData>
+        </a:graphic>
+      </p:graphicFrame>
+    </p:spTree>
+  </p:cSld>
+  <p:clrMapOvr>
+    <a:masterClrMapping/>
+  </p:clrMapOvr>
+</p:sld>
+</file>
+
+<file path=ppt/slides/slide45.xml><?xml version="1.0" encoding="utf-8"?>
+<p:sld xmlns:a="http://schemas.openxmlformats.org/drawingml/2006/main" xmlns:r="http://schemas.openxmlformats.org/officeDocument/2006/relationships" xmlns:p="http://schemas.openxmlformats.org/presentationml/2006/main">
+  <p:cSld>
+    <p:bg>
+      <p:bgPr>
+        <a:solidFill>
+          <a:srgbClr val="FFFFFF"/>
+        </a:solidFill>
+        <a:effectLst/>
+      </p:bgPr>
+    </p:bg>
+    <p:spTree>
+      <p:nvGrpSpPr>
+        <p:cNvPr id="1" name=""/>
+        <p:cNvGrpSpPr/>
+        <p:nvPr/>
+      </p:nvGrpSpPr>
+      <p:grpSpPr>
+        <a:xfrm>
+          <a:off x="0" y="0"/>
+          <a:ext cx="0" cy="0"/>
+          <a:chOff x="0" y="0"/>
+          <a:chExt cx="0" cy="0"/>
+        </a:xfrm>
+      </p:grpSpPr>
+      <p:sp>
+        <p:nvSpPr>
+          <p:cNvPr id="2" name="Shape 0"/>
+          <p:cNvSpPr/>
+          <p:nvPr/>
+        </p:nvSpPr>
+        <p:spPr>
+          <a:xfrm>
+            <a:off x="0" y="0"/>
+            <a:ext cx="9144000" cy="822960"/>
+          </a:xfrm>
+          <a:prstGeom prst="rect">
+            <a:avLst/>
+          </a:prstGeom>
+          <a:solidFill>
+            <a:srgbClr val="1E2761"/>
+          </a:solidFill>
+          <a:ln>
+            <a:noFill/>
+          </a:ln>
+        </p:spPr>
+        <p:txBody>
+          <a:bodyPr/>
+          <a:lstStyle/>
+          <a:p>
+            <a:endParaRPr lang="en-US"/>
+          </a:p>
+        </p:txBody>
+      </p:sp>
+      <p:sp>
+        <p:nvSpPr>
+          <p:cNvPr id="3" name="Text 1"/>
+          <p:cNvSpPr/>
+          <p:nvPr/>
+        </p:nvSpPr>
+        <p:spPr>
+          <a:xfrm>
+            <a:off x="365760" y="91440"/>
+            <a:ext cx="8229600" cy="640080"/>
+          </a:xfrm>
+          <a:prstGeom prst="rect">
+            <a:avLst/>
+          </a:prstGeom>
+          <a:solidFill>
+            <a:srgbClr val="1E2761"/>
+          </a:solidFill>
+          <a:ln>
+            <a:noFill/>
+          </a:ln>
+        </p:spPr>
+        <p:txBody>
+          <a:bodyPr wrap="square" lIns="0" tIns="0" rIns="0" bIns="0" rtlCol="0" anchor="ctr"/>
+          <a:lstStyle/>
+          <a:p>
+            <a:pPr marL="0" indent="0">
+              <a:buNone/>
+            </a:pPr>
+            <a:r>
+              <a:rPr lang="en-US" sz="2800" b="1" dirty="0">
+                <a:solidFill>
+                  <a:srgbClr val="FFFFFF"/>
+                </a:solidFill>
+                <a:latin typeface="Calibri" pitchFamily="34" charset="0"/>
+                <a:ea typeface="Calibri" pitchFamily="34" charset="-122"/>
+                <a:cs typeface="Calibri" pitchFamily="34" charset="-120"/>
+              </a:rPr>
+              <a:t>Business Impact</a:t>
+            </a:r>
+            <a:endParaRPr lang="en-US" sz="2800" dirty="0"/>
+          </a:p>
+        </p:txBody>
+      </p:sp>
+      <p:sp>
+        <p:nvSpPr>
+          <p:cNvPr id="4" name="Shape 2"/>
+          <p:cNvSpPr/>
+          <p:nvPr/>
+        </p:nvSpPr>
+        <p:spPr>
+          <a:xfrm>
+            <a:off x="274320" y="960120"/>
+            <a:ext cx="4160520" cy="1783080"/>
+          </a:xfrm>
+          <a:prstGeom prst="rect">
+            <a:avLst/>
+          </a:prstGeom>
+          <a:solidFill>
+            <a:srgbClr val="FFFFFF"/>
+          </a:solidFill>
+          <a:ln w="12700">
+            <a:solidFill>
+              <a:srgbClr val="E2E8F0"/>
+            </a:solidFill>
+            <a:prstDash val="solid"/>
+          </a:ln>
+          <a:effectLst>
+            <a:outerShdw blurRad="101600" dist="38100" dir="8100000" algn="bl" rotWithShape="0">
+              <a:srgbClr val="000000">
+                <a:alpha val="12000"/>
+              </a:srgbClr>
+            </a:outerShdw>
+          </a:effectLst>
+        </p:spPr>
+        <p:txBody>
+          <a:bodyPr/>
+          <a:lstStyle/>
+          <a:p>
+            <a:endParaRPr lang="en-US"/>
+          </a:p>
+        </p:txBody>
+      </p:sp>
+      <p:sp>
+        <p:nvSpPr>
+          <p:cNvPr id="5" name="Shape 3"/>
+          <p:cNvSpPr/>
+          <p:nvPr/>
+        </p:nvSpPr>
+        <p:spPr>
+          <a:xfrm>
+            <a:off x="274320" y="960120"/>
+            <a:ext cx="4160520" cy="64008"/>
+          </a:xfrm>
+          <a:prstGeom prst="rect">
+            <a:avLst/>
+          </a:prstGeom>
+          <a:solidFill>
+            <a:srgbClr val="0891B2"/>
+          </a:solidFill>
+          <a:ln w="12700">
+            <a:solidFill>
+              <a:srgbClr val="0891B2"/>
+            </a:solidFill>
+            <a:prstDash val="solid"/>
+          </a:ln>
+        </p:spPr>
+        <p:txBody>
+          <a:bodyPr/>
+          <a:lstStyle/>
+          <a:p>
+            <a:endParaRPr lang="en-US"/>
+          </a:p>
+        </p:txBody>
+      </p:sp>
+      <p:sp>
+        <p:nvSpPr>
+          <p:cNvPr id="6" name="Text 4"/>
+          <p:cNvSpPr/>
+          <p:nvPr/>
+        </p:nvSpPr>
+        <p:spPr>
+          <a:xfrm>
+            <a:off x="457200" y="1097280"/>
+            <a:ext cx="3749040" cy="411480"/>
+          </a:xfrm>
+          <a:prstGeom prst="rect">
+            <a:avLst/>
+          </a:prstGeom>
+          <a:noFill/>
+        </p:spPr>
+        <p:txBody>
+          <a:bodyPr wrap="square" lIns="0" tIns="0" rIns="0" bIns="0" rtlCol="0" anchor="ctr"/>
+          <a:lstStyle/>
+          <a:p>
+            <a:pPr marL="0" indent="0">
+              <a:buNone/>
+            </a:pPr>
+            <a:r>
+              <a:rPr lang="en-US" sz="1400" b="1" dirty="0">
+                <a:solidFill>
+                  <a:srgbClr val="1E2761"/>
+                </a:solidFill>
+                <a:latin typeface="Calibri" pitchFamily="34" charset="0"/>
+                <a:ea typeface="Calibri" pitchFamily="34" charset="-122"/>
+                <a:cs typeface="Calibri" pitchFamily="34" charset="-120"/>
+              </a:rPr>
+              <a:t>📊  Strong Churn Detection</a:t>
+            </a:r>
+            <a:endParaRPr lang="en-US" sz="1400" dirty="0"/>
+          </a:p>
+        </p:txBody>
+      </p:sp>
+      <p:sp>
+        <p:nvSpPr>
+          <p:cNvPr id="7" name="Text 5"/>
+          <p:cNvSpPr/>
+          <p:nvPr/>
+        </p:nvSpPr>
+        <p:spPr>
+          <a:xfrm>
+            <a:off x="457200" y="1554480"/>
+            <a:ext cx="3749040" cy="1051560"/>
+          </a:xfrm>
+          <a:prstGeom prst="rect">
+            <a:avLst/>
+          </a:prstGeom>
+          <a:noFill/>
+        </p:spPr>
+        <p:txBody>
+          <a:bodyPr wrap="square" lIns="0" tIns="0" rIns="0" bIns="0" rtlCol="0" anchor="t"/>
+          <a:lstStyle/>
+          <a:p>
+            <a:pPr marL="0" indent="0">
+              <a:buNone/>
+            </a:pPr>
+            <a:r>
+              <a:rPr lang="en-US" sz="1150" dirty="0">
+                <a:solidFill>
+                  <a:srgbClr val="1E2761"/>
+                </a:solidFill>
+                <a:latin typeface="Calibri" pitchFamily="34" charset="0"/>
+                <a:ea typeface="Calibri" pitchFamily="34" charset="-122"/>
+                <a:cs typeface="Calibri" pitchFamily="34" charset="-120"/>
+              </a:rPr>
+              <a:t>Random Forest catches 72% of churners, giving retention teams early warning to intervene with targeted offers before customers leave.</a:t>
+            </a:r>
+            <a:endParaRPr lang="en-US" sz="1150" dirty="0"/>
+          </a:p>
+        </p:txBody>
+      </p:sp>
+      <p:sp>
+        <p:nvSpPr>
+          <p:cNvPr id="8" name="Shape 6"/>
+          <p:cNvSpPr/>
+          <p:nvPr/>
+        </p:nvSpPr>
+        <p:spPr>
+          <a:xfrm>
+            <a:off x="4709160" y="960120"/>
+            <a:ext cx="4160520" cy="1783080"/>
+          </a:xfrm>
+          <a:prstGeom prst="rect">
+            <a:avLst/>
+          </a:prstGeom>
+          <a:solidFill>
+            <a:srgbClr val="FFFFFF"/>
+          </a:solidFill>
+          <a:ln w="12700">
+            <a:solidFill>
+              <a:srgbClr val="E2E8F0"/>
+            </a:solidFill>
+            <a:prstDash val="solid"/>
+          </a:ln>
+          <a:effectLst>
+            <a:outerShdw blurRad="101600" dist="38100" dir="8100000" algn="bl" rotWithShape="0">
+              <a:srgbClr val="000000">
+                <a:alpha val="12000"/>
+              </a:srgbClr>
+            </a:outerShdw>
+          </a:effectLst>
+        </p:spPr>
+        <p:txBody>
+          <a:bodyPr/>
+          <a:lstStyle/>
+          <a:p>
+            <a:endParaRPr lang="en-US"/>
+          </a:p>
+        </p:txBody>
+      </p:sp>
+      <p:sp>
+        <p:nvSpPr>
+          <p:cNvPr id="9" name="Shape 7"/>
+          <p:cNvSpPr/>
+          <p:nvPr/>
+        </p:nvSpPr>
+        <p:spPr>
+          <a:xfrm>
+            <a:off x="4709160" y="960120"/>
+            <a:ext cx="4160520" cy="64008"/>
+          </a:xfrm>
+          <a:prstGeom prst="rect">
+            <a:avLst/>
+          </a:prstGeom>
+          <a:solidFill>
+            <a:srgbClr val="0891B2"/>
+          </a:solidFill>
+          <a:ln w="12700">
+            <a:solidFill>
+              <a:srgbClr val="0891B2"/>
+            </a:solidFill>
+            <a:prstDash val="solid"/>
+          </a:ln>
+        </p:spPr>
+        <p:txBody>
+          <a:bodyPr/>
+          <a:lstStyle/>
+          <a:p>
+            <a:endParaRPr lang="en-US"/>
+          </a:p>
+        </p:txBody>
+      </p:sp>
+      <p:sp>
+        <p:nvSpPr>
+          <p:cNvPr id="10" name="Text 8"/>
+          <p:cNvSpPr/>
+          <p:nvPr/>
+        </p:nvSpPr>
+        <p:spPr>
+          <a:xfrm>
+            <a:off x="4892040" y="1097280"/>
+            <a:ext cx="3749040" cy="411480"/>
+          </a:xfrm>
+          <a:prstGeom prst="rect">
+            <a:avLst/>
+          </a:prstGeom>
+          <a:noFill/>
+        </p:spPr>
+        <p:txBody>
+          <a:bodyPr wrap="square" lIns="0" tIns="0" rIns="0" bIns="0" rtlCol="0" anchor="ctr"/>
+          <a:lstStyle/>
+          <a:p>
+            <a:pPr marL="0" indent="0">
+              <a:buNone/>
+            </a:pPr>
+            <a:r>
+              <a:rPr lang="en-US" sz="1400" b="1" dirty="0">
+                <a:solidFill>
+                  <a:srgbClr val="1E2761"/>
+                </a:solidFill>
+                <a:latin typeface="Calibri" pitchFamily="34" charset="0"/>
+                <a:ea typeface="Calibri" pitchFamily="34" charset="-122"/>
+                <a:cs typeface="Calibri" pitchFamily="34" charset="-120"/>
+              </a:rPr>
+              <a:t>🎯  Transparent Feature Ranking</a:t>
+            </a:r>
+            <a:endParaRPr lang="en-US" sz="1400" dirty="0"/>
+          </a:p>
+        </p:txBody>
+      </p:sp>
+      <p:sp>
+        <p:nvSpPr>
+          <p:cNvPr id="11" name="Text 9"/>
+          <p:cNvSpPr/>
+          <p:nvPr/>
+        </p:nvSpPr>
+        <p:spPr>
+          <a:xfrm>
+            <a:off x="4892040" y="1554480"/>
+            <a:ext cx="3749040" cy="1051560"/>
+          </a:xfrm>
+          <a:prstGeom prst="rect">
+            <a:avLst/>
+          </a:prstGeom>
+          <a:noFill/>
+        </p:spPr>
+        <p:txBody>
+          <a:bodyPr wrap="square" lIns="0" tIns="0" rIns="0" bIns="0" rtlCol="0" anchor="t"/>
+          <a:lstStyle/>
+          <a:p>
+            <a:pPr marL="0" indent="0">
+              <a:buNone/>
+            </a:pPr>
+            <a:r>
+              <a:rPr lang="en-US" sz="1150" dirty="0">
+                <a:solidFill>
+                  <a:srgbClr val="1E2761"/>
+                </a:solidFill>
+                <a:latin typeface="Calibri" pitchFamily="34" charset="0"/>
+                <a:ea typeface="Calibri" pitchFamily="34" charset="-122"/>
+                <a:cs typeface="Calibri" pitchFamily="34" charset="-120"/>
+              </a:rPr>
+              <a:t>Built-in feature importance reveals that international plan, total day minutes, and service calls are top churn drivers — directly actionable insights.</a:t>
+            </a:r>
+            <a:endParaRPr lang="en-US" sz="1150" dirty="0"/>
+          </a:p>
+        </p:txBody>
+      </p:sp>
+      <p:sp>
+        <p:nvSpPr>
+          <p:cNvPr id="12" name="Shape 10"/>
+          <p:cNvSpPr/>
+          <p:nvPr/>
+        </p:nvSpPr>
+        <p:spPr>
+          <a:xfrm>
+            <a:off x="274320" y="2926080"/>
+            <a:ext cx="4160520" cy="1783080"/>
+          </a:xfrm>
+          <a:prstGeom prst="rect">
+            <a:avLst/>
+          </a:prstGeom>
+          <a:solidFill>
+            <a:srgbClr val="FFFFFF"/>
+          </a:solidFill>
+          <a:ln w="12700">
+            <a:solidFill>
+              <a:srgbClr val="E2E8F0"/>
+            </a:solidFill>
+            <a:prstDash val="solid"/>
+          </a:ln>
+          <a:effectLst>
+            <a:outerShdw blurRad="101600" dist="38100" dir="8100000" algn="bl" rotWithShape="0">
+              <a:srgbClr val="000000">
+                <a:alpha val="12000"/>
+              </a:srgbClr>
+            </a:outerShdw>
+          </a:effectLst>
+        </p:spPr>
+        <p:txBody>
+          <a:bodyPr/>
+          <a:lstStyle/>
+          <a:p>
+            <a:endParaRPr lang="en-US"/>
+          </a:p>
+        </p:txBody>
+      </p:sp>
+      <p:sp>
+        <p:nvSpPr>
+          <p:cNvPr id="13" name="Shape 11"/>
+          <p:cNvSpPr/>
+          <p:nvPr/>
+        </p:nvSpPr>
+        <p:spPr>
+          <a:xfrm>
+            <a:off x="274320" y="2926080"/>
+            <a:ext cx="4160520" cy="64008"/>
+          </a:xfrm>
+          <a:prstGeom prst="rect">
+            <a:avLst/>
+          </a:prstGeom>
+          <a:solidFill>
+            <a:srgbClr val="0891B2"/>
+          </a:solidFill>
+          <a:ln w="12700">
+            <a:solidFill>
+              <a:srgbClr val="0891B2"/>
+            </a:solidFill>
+            <a:prstDash val="solid"/>
+          </a:ln>
+        </p:spPr>
+        <p:txBody>
+          <a:bodyPr/>
+          <a:lstStyle/>
+          <a:p>
+            <a:endParaRPr lang="en-US"/>
+          </a:p>
+        </p:txBody>
+      </p:sp>
+      <p:sp>
+        <p:nvSpPr>
+          <p:cNvPr id="14" name="Text 12"/>
+          <p:cNvSpPr/>
+          <p:nvPr/>
+        </p:nvSpPr>
+        <p:spPr>
+          <a:xfrm>
+            <a:off x="457200" y="3063240"/>
+            <a:ext cx="3749040" cy="411480"/>
+          </a:xfrm>
+          <a:prstGeom prst="rect">
+            <a:avLst/>
+          </a:prstGeom>
+          <a:noFill/>
+        </p:spPr>
+        <p:txBody>
+          <a:bodyPr wrap="square" lIns="0" tIns="0" rIns="0" bIns="0" rtlCol="0" anchor="ctr"/>
+          <a:lstStyle/>
+          <a:p>
+            <a:pPr marL="0" indent="0">
+              <a:buNone/>
+            </a:pPr>
+            <a:r>
+              <a:rPr lang="en-US" sz="1400" b="1" dirty="0">
+                <a:solidFill>
+                  <a:srgbClr val="1E2761"/>
+                </a:solidFill>
+                <a:latin typeface="Calibri" pitchFamily="34" charset="0"/>
+                <a:ea typeface="Calibri" pitchFamily="34" charset="-122"/>
+                <a:cs typeface="Calibri" pitchFamily="34" charset="-120"/>
+              </a:rPr>
+              <a:t>🔑  Robust to Overfitting</a:t>
+            </a:r>
+            <a:endParaRPr lang="en-US" sz="1400" dirty="0"/>
+          </a:p>
+        </p:txBody>
+      </p:sp>
+      <p:sp>
+        <p:nvSpPr>
+          <p:cNvPr id="15" name="Text 13"/>
+          <p:cNvSpPr/>
+          <p:nvPr/>
+        </p:nvSpPr>
+        <p:spPr>
+          <a:xfrm>
+            <a:off x="457200" y="3520440"/>
+            <a:ext cx="3749040" cy="1051560"/>
+          </a:xfrm>
+          <a:prstGeom prst="rect">
+            <a:avLst/>
+          </a:prstGeom>
+          <a:noFill/>
+        </p:spPr>
+        <p:txBody>
+          <a:bodyPr wrap="square" lIns="0" tIns="0" rIns="0" bIns="0" rtlCol="0" anchor="t"/>
+          <a:lstStyle/>
+          <a:p>
+            <a:pPr marL="0" indent="0">
+              <a:buNone/>
+            </a:pPr>
+            <a:r>
+              <a:rPr lang="en-US" sz="1150" dirty="0">
+                <a:solidFill>
+                  <a:srgbClr val="1E2761"/>
+                </a:solidFill>
+                <a:latin typeface="Calibri" pitchFamily="34" charset="0"/>
+                <a:ea typeface="Calibri" pitchFamily="34" charset="-122"/>
+                <a:cs typeface="Calibri" pitchFamily="34" charset="-120"/>
+              </a:rPr>
+              <a:t>Bagging and random feature selection reduce variance and prevent overfitting. No single noisy feature can dominate the ensemble prediction.</a:t>
+            </a:r>
+            <a:endParaRPr lang="en-US" sz="1150" dirty="0"/>
+          </a:p>
+        </p:txBody>
+      </p:sp>
+      <p:sp>
+        <p:nvSpPr>
+          <p:cNvPr id="16" name="Shape 14"/>
+          <p:cNvSpPr/>
+          <p:nvPr/>
+        </p:nvSpPr>
+        <p:spPr>
+          <a:xfrm>
+            <a:off x="4709160" y="2926080"/>
+            <a:ext cx="4160520" cy="1783080"/>
+          </a:xfrm>
+          <a:prstGeom prst="rect">
+            <a:avLst/>
+          </a:prstGeom>
+          <a:solidFill>
+            <a:srgbClr val="FFFFFF"/>
+          </a:solidFill>
+          <a:ln w="12700">
+            <a:solidFill>
+              <a:srgbClr val="E2E8F0"/>
+            </a:solidFill>
+            <a:prstDash val="solid"/>
+          </a:ln>
+          <a:effectLst>
+            <a:outerShdw blurRad="101600" dist="38100" dir="8100000" algn="bl" rotWithShape="0">
+              <a:srgbClr val="000000">
+                <a:alpha val="12000"/>
+              </a:srgbClr>
+            </a:outerShdw>
+          </a:effectLst>
+        </p:spPr>
+        <p:txBody>
+          <a:bodyPr/>
+          <a:lstStyle/>
+          <a:p>
+            <a:endParaRPr lang="en-US"/>
+          </a:p>
+        </p:txBody>
+      </p:sp>
+      <p:sp>
+        <p:nvSpPr>
+          <p:cNvPr id="17" name="Shape 15"/>
+          <p:cNvSpPr/>
+          <p:nvPr/>
+        </p:nvSpPr>
+        <p:spPr>
+          <a:xfrm>
+            <a:off x="4709160" y="2926080"/>
+            <a:ext cx="4160520" cy="64008"/>
+          </a:xfrm>
+          <a:prstGeom prst="rect">
+            <a:avLst/>
+          </a:prstGeom>
+          <a:solidFill>
+            <a:srgbClr val="0891B2"/>
+          </a:solidFill>
+          <a:ln w="12700">
+            <a:solidFill>
+              <a:srgbClr val="0891B2"/>
+            </a:solidFill>
+            <a:prstDash val="solid"/>
+          </a:ln>
+        </p:spPr>
+        <p:txBody>
+          <a:bodyPr/>
+          <a:lstStyle/>
+          <a:p>
+            <a:endParaRPr lang="en-US"/>
+          </a:p>
+        </p:txBody>
+      </p:sp>
+      <p:sp>
+        <p:nvSpPr>
+          <p:cNvPr id="18" name="Text 16"/>
+          <p:cNvSpPr/>
+          <p:nvPr/>
+        </p:nvSpPr>
+        <p:spPr>
+          <a:xfrm>
+            <a:off x="4892040" y="3063240"/>
+            <a:ext cx="3749040" cy="411480"/>
+          </a:xfrm>
+          <a:prstGeom prst="rect">
+            <a:avLst/>
+          </a:prstGeom>
+          <a:noFill/>
+        </p:spPr>
+        <p:txBody>
+          <a:bodyPr wrap="square" lIns="0" tIns="0" rIns="0" bIns="0" rtlCol="0" anchor="ctr"/>
+          <a:lstStyle/>
+          <a:p>
+            <a:pPr marL="0" indent="0">
+              <a:buNone/>
+            </a:pPr>
+            <a:r>
+              <a:rPr lang="en-US" sz="1400" b="1" dirty="0">
+                <a:solidFill>
+                  <a:srgbClr val="1E2761"/>
+                </a:solidFill>
+                <a:latin typeface="Calibri" pitchFamily="34" charset="0"/>
+                <a:ea typeface="Calibri" pitchFamily="34" charset="-122"/>
+                <a:cs typeface="Calibri" pitchFamily="34" charset="-120"/>
+              </a:rPr>
+              <a:t>💰  No Hyperparameter Tuning Needed</a:t>
+            </a:r>
+            <a:endParaRPr lang="en-US" sz="1400" dirty="0"/>
+          </a:p>
+        </p:txBody>
+      </p:sp>
+      <p:sp>
+        <p:nvSpPr>
+          <p:cNvPr id="19" name="Text 17"/>
+          <p:cNvSpPr/>
+          <p:nvPr/>
+        </p:nvSpPr>
+        <p:spPr>
+          <a:xfrm>
+            <a:off x="4892040" y="3520440"/>
+            <a:ext cx="3749040" cy="1051560"/>
+          </a:xfrm>
+          <a:prstGeom prst="rect">
+            <a:avLst/>
+          </a:prstGeom>
+          <a:noFill/>
+        </p:spPr>
+        <p:txBody>
+          <a:bodyPr wrap="square" lIns="0" tIns="0" rIns="0" bIns="0" rtlCol="0" anchor="t"/>
+          <a:lstStyle/>
+          <a:p>
+            <a:pPr marL="0" indent="0">
+              <a:buNone/>
+            </a:pPr>
+            <a:r>
+              <a:rPr lang="en-US" sz="1150" dirty="0">
+                <a:solidFill>
+                  <a:srgbClr val="1E2761"/>
+                </a:solidFill>
+                <a:latin typeface="Calibri" pitchFamily="34" charset="0"/>
+                <a:ea typeface="Calibri" pitchFamily="34" charset="-122"/>
+                <a:cs typeface="Calibri" pitchFamily="34" charset="-120"/>
+              </a:rPr>
+              <a:t>Random Forest works well out-of-the-box with default parameters. Strong 93.1% accuracy achieved with minimal configuration — ideal for rapid prototyping.</a:t>
+            </a:r>
+            <a:endParaRPr lang="en-US" sz="1150" dirty="0"/>
+          </a:p>
+        </p:txBody>
+      </p:sp>
+    </p:spTree>
+  </p:cSld>
+  <p:clrMapOvr>
+    <a:masterClrMapping/>
+  </p:clrMapOvr>
+</p:sld>
+</file>
+
+<file path=ppt/slides/slide46.xml><?xml version="1.0" encoding="utf-8"?>
+<p:sld xmlns:a="http://schemas.openxmlformats.org/drawingml/2006/main" xmlns:r="http://schemas.openxmlformats.org/officeDocument/2006/relationships" xmlns:p="http://schemas.openxmlformats.org/presentationml/2006/main">
+  <p:cSld>
+    <p:bg>
+      <p:bgPr>
+        <a:solidFill>
+          <a:srgbClr val="FFFFFF"/>
+        </a:solidFill>
+        <a:effectLst/>
+      </p:bgPr>
+    </p:bg>
+    <p:spTree>
+      <p:nvGrpSpPr>
+        <p:cNvPr id="1" name=""/>
+        <p:cNvGrpSpPr/>
+        <p:nvPr/>
+      </p:nvGrpSpPr>
+      <p:grpSpPr>
+        <a:xfrm>
+          <a:off x="0" y="0"/>
+          <a:ext cx="0" cy="0"/>
+          <a:chOff x="0" y="0"/>
+          <a:chExt cx="0" cy="0"/>
+        </a:xfrm>
+      </p:grpSpPr>
+      <p:sp>
+        <p:nvSpPr>
+          <p:cNvPr id="2" name="Shape 0"/>
+          <p:cNvSpPr/>
+          <p:nvPr/>
+        </p:nvSpPr>
+        <p:spPr>
+          <a:xfrm>
+            <a:off x="0" y="0"/>
+            <a:ext cx="9144000" cy="822960"/>
+          </a:xfrm>
+          <a:prstGeom prst="rect">
+            <a:avLst/>
+          </a:prstGeom>
+          <a:solidFill>
+            <a:srgbClr val="1E2761"/>
+          </a:solidFill>
+          <a:ln>
+            <a:noFill/>
+          </a:ln>
+        </p:spPr>
+        <p:txBody>
+          <a:bodyPr/>
+          <a:lstStyle/>
+          <a:p>
+            <a:endParaRPr lang="en-US"/>
+          </a:p>
+        </p:txBody>
+      </p:sp>
+      <p:sp>
+        <p:nvSpPr>
+          <p:cNvPr id="3" name="Text 1"/>
+          <p:cNvSpPr/>
+          <p:nvPr/>
+        </p:nvSpPr>
+        <p:spPr>
+          <a:xfrm>
+            <a:off x="365760" y="91440"/>
+            <a:ext cx="8229600" cy="640080"/>
+          </a:xfrm>
+          <a:prstGeom prst="rect">
+            <a:avLst/>
+          </a:prstGeom>
+          <a:solidFill>
+            <a:srgbClr val="1E2761"/>
+          </a:solidFill>
+          <a:ln>
+            <a:noFill/>
+          </a:ln>
+        </p:spPr>
+        <p:txBody>
+          <a:bodyPr wrap="square" lIns="0" tIns="0" rIns="0" bIns="0" rtlCol="0" anchor="ctr"/>
+          <a:lstStyle/>
+          <a:p>
+            <a:pPr marL="0" indent="0">
+              <a:buNone/>
+            </a:pPr>
+            <a:r>
+              <a:rPr lang="en-US" sz="2800" b="1" dirty="0">
+                <a:solidFill>
+                  <a:srgbClr val="FFFFFF"/>
+                </a:solidFill>
+                <a:latin typeface="Calibri" pitchFamily="34" charset="0"/>
+                <a:ea typeface="Calibri" pitchFamily="34" charset="-122"/>
+                <a:cs typeface="Calibri" pitchFamily="34" charset="-120"/>
+              </a:rPr>
+              <a:t>Top Feature Importances</a:t>
+            </a:r>
+            <a:endParaRPr lang="en-US" sz="2800" dirty="0"/>
+          </a:p>
+        </p:txBody>
+      </p:sp>
+      <p:sp>
+        <p:nvSpPr>
+          <p:cNvPr id="4" name="Shape 2"/>
+          <p:cNvSpPr/>
+          <p:nvPr/>
+        </p:nvSpPr>
+        <p:spPr>
+          <a:xfrm>
+            <a:off x="274320" y="960120"/>
+            <a:ext cx="4160520" cy="1783080"/>
+          </a:xfrm>
+          <a:prstGeom prst="rect">
+            <a:avLst/>
+          </a:prstGeom>
+          <a:solidFill>
+            <a:srgbClr val="FFFFFF"/>
+          </a:solidFill>
+          <a:ln w="12700">
+            <a:solidFill>
+              <a:srgbClr val="E2E8F0"/>
+            </a:solidFill>
+            <a:prstDash val="solid"/>
+          </a:ln>
+          <a:effectLst>
+            <a:outerShdw blurRad="101600" dist="38100" dir="8100000" algn="bl" rotWithShape="0">
+              <a:srgbClr val="000000">
+                <a:alpha val="12000"/>
+              </a:srgbClr>
+            </a:outerShdw>
+          </a:effectLst>
+        </p:spPr>
+        <p:txBody>
+          <a:bodyPr/>
+          <a:lstStyle/>
+          <a:p>
+            <a:endParaRPr lang="en-US"/>
+          </a:p>
+        </p:txBody>
+      </p:sp>
+      <p:sp>
+        <p:nvSpPr>
+          <p:cNvPr id="5" name="Shape 3"/>
+          <p:cNvSpPr/>
+          <p:nvPr/>
+        </p:nvSpPr>
+        <p:spPr>
+          <a:xfrm>
+            <a:off x="274320" y="960120"/>
+            <a:ext cx="4160520" cy="64008"/>
+          </a:xfrm>
+          <a:prstGeom prst="rect">
+            <a:avLst/>
+          </a:prstGeom>
+          <a:solidFill>
+            <a:srgbClr val="0891B2"/>
+          </a:solidFill>
+          <a:ln w="12700">
+            <a:solidFill>
+              <a:srgbClr val="0891B2"/>
+            </a:solidFill>
+            <a:prstDash val="solid"/>
+          </a:ln>
+        </p:spPr>
+        <p:txBody>
+          <a:bodyPr/>
+          <a:lstStyle/>
+          <a:p>
+            <a:endParaRPr lang="en-US"/>
+          </a:p>
+        </p:txBody>
+      </p:sp>
+      <p:sp>
+        <p:nvSpPr>
+          <p:cNvPr id="6" name="Text 4"/>
+          <p:cNvSpPr/>
+          <p:nvPr/>
+        </p:nvSpPr>
+        <p:spPr>
+          <a:xfrm>
+            <a:off x="457200" y="1097280"/>
+            <a:ext cx="3749040" cy="411480"/>
+          </a:xfrm>
+          <a:prstGeom prst="rect">
+            <a:avLst/>
+          </a:prstGeom>
+          <a:noFill/>
+        </p:spPr>
+        <p:txBody>
+          <a:bodyPr wrap="square" lIns="0" tIns="0" rIns="0" bIns="0" rtlCol="0" anchor="ctr"/>
+          <a:lstStyle/>
+          <a:p>
+            <a:pPr marL="0" indent="0">
+              <a:buNone/>
+            </a:pPr>
+            <a:r>
+              <a:rPr lang="en-US" sz="1400" b="1" dirty="0">
+                <a:solidFill>
+                  <a:srgbClr val="1E2761"/>
+                </a:solidFill>
+                <a:latin typeface="Calibri" pitchFamily="34" charset="0"/>
+                <a:ea typeface="Calibri" pitchFamily="34" charset="-122"/>
+                <a:cs typeface="Calibri" pitchFamily="34" charset="-120"/>
+              </a:rPr>
+              <a:t>Total Day Minutes (0.107)</a:t>
+            </a:r>
+            <a:endParaRPr lang="en-US" sz="1400" dirty="0"/>
+          </a:p>
+        </p:txBody>
+      </p:sp>
+      <p:sp>
+        <p:nvSpPr>
+          <p:cNvPr id="7" name="Text 5"/>
+          <p:cNvSpPr/>
+          <p:nvPr/>
+        </p:nvSpPr>
+        <p:spPr>
+          <a:xfrm>
+            <a:off x="457200" y="1554480"/>
+            <a:ext cx="3749040" cy="1051560"/>
+          </a:xfrm>
+          <a:prstGeom prst="rect">
+            <a:avLst/>
+          </a:prstGeom>
+          <a:noFill/>
+        </p:spPr>
+        <p:txBody>
+          <a:bodyPr wrap="square" lIns="0" tIns="0" rIns="0" bIns="0" rtlCol="0" anchor="t"/>
+          <a:lstStyle/>
+          <a:p>
+            <a:pPr marL="0" indent="0">
+              <a:buNone/>
+            </a:pPr>
+            <a:r>
+              <a:rPr lang="en-US" sz="1150" dirty="0">
+                <a:solidFill>
+                  <a:srgbClr val="1E2761"/>
+                </a:solidFill>
+                <a:latin typeface="Calibri" pitchFamily="34" charset="0"/>
+                <a:ea typeface="Calibri" pitchFamily="34" charset="-122"/>
+                <a:cs typeface="Calibri" pitchFamily="34" charset="-120"/>
+              </a:rPr>
+              <a:t>Daytime usage is the strongest predictor of churn. Heavy users likely face higher bills, making them more price-sensitive and prone to switching providers.</a:t>
+            </a:r>
+            <a:endParaRPr lang="en-US" sz="1150" dirty="0"/>
+          </a:p>
+        </p:txBody>
+      </p:sp>
+      <p:sp>
+        <p:nvSpPr>
+          <p:cNvPr id="8" name="Shape 6"/>
+          <p:cNvSpPr/>
+          <p:nvPr/>
+        </p:nvSpPr>
+        <p:spPr>
+          <a:xfrm>
+            <a:off x="4709160" y="960120"/>
+            <a:ext cx="4160520" cy="1783080"/>
+          </a:xfrm>
+          <a:prstGeom prst="rect">
+            <a:avLst/>
+          </a:prstGeom>
+          <a:solidFill>
+            <a:srgbClr val="FFFFFF"/>
+          </a:solidFill>
+          <a:ln w="12700">
+            <a:solidFill>
+              <a:srgbClr val="E2E8F0"/>
+            </a:solidFill>
+            <a:prstDash val="solid"/>
+          </a:ln>
+          <a:effectLst>
+            <a:outerShdw blurRad="101600" dist="38100" dir="8100000" algn="bl" rotWithShape="0">
+              <a:srgbClr val="000000">
+                <a:alpha val="12000"/>
+              </a:srgbClr>
+            </a:outerShdw>
+          </a:effectLst>
+        </p:spPr>
+        <p:txBody>
+          <a:bodyPr/>
+          <a:lstStyle/>
+          <a:p>
+            <a:endParaRPr lang="en-US"/>
+          </a:p>
+        </p:txBody>
+      </p:sp>
+      <p:sp>
+        <p:nvSpPr>
+          <p:cNvPr id="9" name="Shape 7"/>
+          <p:cNvSpPr/>
+          <p:nvPr/>
+        </p:nvSpPr>
+        <p:spPr>
+          <a:xfrm>
+            <a:off x="4709160" y="960120"/>
+            <a:ext cx="4160520" cy="64008"/>
+          </a:xfrm>
+          <a:prstGeom prst="rect">
+            <a:avLst/>
+          </a:prstGeom>
+          <a:solidFill>
+            <a:srgbClr val="0891B2"/>
+          </a:solidFill>
+          <a:ln w="12700">
+            <a:solidFill>
+              <a:srgbClr val="0891B2"/>
+            </a:solidFill>
+            <a:prstDash val="solid"/>
+          </a:ln>
+        </p:spPr>
+        <p:txBody>
+          <a:bodyPr/>
+          <a:lstStyle/>
+          <a:p>
+            <a:endParaRPr lang="en-US"/>
+          </a:p>
+        </p:txBody>
+      </p:sp>
+      <p:sp>
+        <p:nvSpPr>
+          <p:cNvPr id="10" name="Text 8"/>
+          <p:cNvSpPr/>
+          <p:nvPr/>
+        </p:nvSpPr>
+        <p:spPr>
+          <a:xfrm>
+            <a:off x="4892040" y="1097280"/>
+            <a:ext cx="3749040" cy="411480"/>
+          </a:xfrm>
+          <a:prstGeom prst="rect">
+            <a:avLst/>
+          </a:prstGeom>
+          <a:noFill/>
+        </p:spPr>
+        <p:txBody>
+          <a:bodyPr wrap="square" lIns="0" tIns="0" rIns="0" bIns="0" rtlCol="0" anchor="ctr"/>
+          <a:lstStyle/>
+          <a:p>
+            <a:pPr marL="0" indent="0">
+              <a:buNone/>
+            </a:pPr>
+            <a:r>
+              <a:rPr lang="en-US" sz="1400" b="1" dirty="0">
+                <a:solidFill>
+                  <a:srgbClr val="1E2761"/>
+                </a:solidFill>
+                <a:latin typeface="Calibri" pitchFamily="34" charset="0"/>
+                <a:ea typeface="Calibri" pitchFamily="34" charset="-122"/>
+                <a:cs typeface="Calibri" pitchFamily="34" charset="-120"/>
+              </a:rPr>
+              <a:t>Customer Service Calls (0.092)</a:t>
+            </a:r>
+            <a:endParaRPr lang="en-US" sz="1400" dirty="0"/>
+          </a:p>
+        </p:txBody>
+      </p:sp>
+      <p:sp>
+        <p:nvSpPr>
+          <p:cNvPr id="11" name="Text 9"/>
+          <p:cNvSpPr/>
+          <p:nvPr/>
+        </p:nvSpPr>
+        <p:spPr>
+          <a:xfrm>
+            <a:off x="4892040" y="1554480"/>
+            <a:ext cx="3749040" cy="1051560"/>
+          </a:xfrm>
+          <a:prstGeom prst="rect">
+            <a:avLst/>
+          </a:prstGeom>
+          <a:noFill/>
+        </p:spPr>
+        <p:txBody>
+          <a:bodyPr wrap="square" lIns="0" tIns="0" rIns="0" bIns="0" rtlCol="0" anchor="t"/>
+          <a:lstStyle/>
+          <a:p>
+            <a:pPr marL="0" indent="0">
+              <a:buNone/>
+            </a:pPr>
+            <a:r>
+              <a:rPr lang="en-US" sz="1150" dirty="0">
+                <a:solidFill>
+                  <a:srgbClr val="1E2761"/>
+                </a:solidFill>
+                <a:latin typeface="Calibri" pitchFamily="34" charset="0"/>
+                <a:ea typeface="Calibri" pitchFamily="34" charset="-122"/>
+                <a:cs typeface="Calibri" pitchFamily="34" charset="-120"/>
+              </a:rPr>
+              <a:t>Frequent service calls signal unresolved issues. Customers calling 4+ times churn at dramatically higher rates — a key behavioural signal for intervention.</a:t>
+            </a:r>
+            <a:endParaRPr lang="en-US" sz="1150" dirty="0"/>
+          </a:p>
+        </p:txBody>
+      </p:sp>
+      <p:sp>
+        <p:nvSpPr>
+          <p:cNvPr id="12" name="Shape 10"/>
+          <p:cNvSpPr/>
+          <p:nvPr/>
+        </p:nvSpPr>
+        <p:spPr>
+          <a:xfrm>
+            <a:off x="274320" y="2926080"/>
+            <a:ext cx="4160520" cy="1783080"/>
+          </a:xfrm>
+          <a:prstGeom prst="rect">
+            <a:avLst/>
+          </a:prstGeom>
+          <a:solidFill>
+            <a:srgbClr val="FFFFFF"/>
+          </a:solidFill>
+          <a:ln w="12700">
+            <a:solidFill>
+              <a:srgbClr val="E2E8F0"/>
+            </a:solidFill>
+            <a:prstDash val="solid"/>
+          </a:ln>
+          <a:effectLst>
+            <a:outerShdw blurRad="101600" dist="38100" dir="8100000" algn="bl" rotWithShape="0">
+              <a:srgbClr val="000000">
+                <a:alpha val="12000"/>
+              </a:srgbClr>
+            </a:outerShdw>
+          </a:effectLst>
+        </p:spPr>
+        <p:txBody>
+          <a:bodyPr/>
+          <a:lstStyle/>
+          <a:p>
+            <a:endParaRPr lang="en-US"/>
+          </a:p>
+        </p:txBody>
+      </p:sp>
+      <p:sp>
+        <p:nvSpPr>
+          <p:cNvPr id="13" name="Shape 11"/>
+          <p:cNvSpPr/>
+          <p:nvPr/>
+        </p:nvSpPr>
+        <p:spPr>
+          <a:xfrm>
+            <a:off x="274320" y="2926080"/>
+            <a:ext cx="4160520" cy="64008"/>
+          </a:xfrm>
+          <a:prstGeom prst="rect">
+            <a:avLst/>
+          </a:prstGeom>
+          <a:solidFill>
+            <a:srgbClr val="0891B2"/>
+          </a:solidFill>
+          <a:ln w="12700">
+            <a:solidFill>
+              <a:srgbClr val="0891B2"/>
+            </a:solidFill>
+            <a:prstDash val="solid"/>
+          </a:ln>
+        </p:spPr>
+        <p:txBody>
+          <a:bodyPr/>
+          <a:lstStyle/>
+          <a:p>
+            <a:endParaRPr lang="en-US"/>
+          </a:p>
+        </p:txBody>
+      </p:sp>
+      <p:sp>
+        <p:nvSpPr>
+          <p:cNvPr id="14" name="Text 12"/>
+          <p:cNvSpPr/>
+          <p:nvPr/>
+        </p:nvSpPr>
+        <p:spPr>
+          <a:xfrm>
+            <a:off x="457200" y="3063240"/>
+            <a:ext cx="3749040" cy="411480"/>
+          </a:xfrm>
+          <a:prstGeom prst="rect">
+            <a:avLst/>
+          </a:prstGeom>
+          <a:noFill/>
+        </p:spPr>
+        <p:txBody>
+          <a:bodyPr wrap="square" lIns="0" tIns="0" rIns="0" bIns="0" rtlCol="0" anchor="ctr"/>
+          <a:lstStyle/>
+          <a:p>
+            <a:pPr marL="0" indent="0">
+              <a:buNone/>
+            </a:pPr>
+            <a:r>
+              <a:rPr lang="en-US" sz="1400" b="1" dirty="0">
+                <a:solidFill>
+                  <a:srgbClr val="1E2761"/>
+                </a:solidFill>
+                <a:latin typeface="Calibri" pitchFamily="34" charset="0"/>
+                <a:ea typeface="Calibri" pitchFamily="34" charset="-122"/>
+                <a:cs typeface="Calibri" pitchFamily="34" charset="-120"/>
+              </a:rPr>
+              <a:t>International Plan (0.085)</a:t>
+            </a:r>
+            <a:endParaRPr lang="en-US" sz="1400" dirty="0"/>
+          </a:p>
+        </p:txBody>
+      </p:sp>
+      <p:sp>
+        <p:nvSpPr>
+          <p:cNvPr id="15" name="Text 13"/>
+          <p:cNvSpPr/>
+          <p:nvPr/>
+        </p:nvSpPr>
+        <p:spPr>
+          <a:xfrm>
+            <a:off x="457200" y="3520440"/>
+            <a:ext cx="3749040" cy="1051560"/>
+          </a:xfrm>
+          <a:prstGeom prst="rect">
+            <a:avLst/>
+          </a:prstGeom>
+          <a:noFill/>
+        </p:spPr>
+        <p:txBody>
+          <a:bodyPr wrap="square" lIns="0" tIns="0" rIns="0" bIns="0" rtlCol="0" anchor="t"/>
+          <a:lstStyle/>
+          <a:p>
+            <a:pPr marL="0" indent="0">
+              <a:buNone/>
+            </a:pPr>
+            <a:r>
+              <a:rPr lang="en-US" sz="1150" dirty="0">
+                <a:solidFill>
+                  <a:srgbClr val="1E2761"/>
+                </a:solidFill>
+                <a:latin typeface="Calibri" pitchFamily="34" charset="0"/>
+                <a:ea typeface="Calibri" pitchFamily="34" charset="-122"/>
+                <a:cs typeface="Calibri" pitchFamily="34" charset="-120"/>
+              </a:rPr>
+              <a:t>Customers with an international plan churn at ~42% vs 11% without. This binary feature carries outsized predictive power, confirmed by all models in the pipeline.</a:t>
+            </a:r>
+            <a:endParaRPr lang="en-US" sz="1150" dirty="0"/>
+          </a:p>
+        </p:txBody>
+      </p:sp>
+      <p:sp>
+        <p:nvSpPr>
+          <p:cNvPr id="16" name="Shape 14"/>
+          <p:cNvSpPr/>
+          <p:nvPr/>
+        </p:nvSpPr>
+        <p:spPr>
+          <a:xfrm>
+            <a:off x="4709160" y="2926080"/>
+            <a:ext cx="4160520" cy="1783080"/>
+          </a:xfrm>
+          <a:prstGeom prst="rect">
+            <a:avLst/>
+          </a:prstGeom>
+          <a:solidFill>
+            <a:srgbClr val="FFFFFF"/>
+          </a:solidFill>
+          <a:ln w="12700">
+            <a:solidFill>
+              <a:srgbClr val="E2E8F0"/>
+            </a:solidFill>
+            <a:prstDash val="solid"/>
+          </a:ln>
+          <a:effectLst>
+            <a:outerShdw blurRad="101600" dist="38100" dir="8100000" algn="bl" rotWithShape="0">
+              <a:srgbClr val="000000">
+                <a:alpha val="12000"/>
+              </a:srgbClr>
+            </a:outerShdw>
+          </a:effectLst>
+        </p:spPr>
+        <p:txBody>
+          <a:bodyPr/>
+          <a:lstStyle/>
+          <a:p>
+            <a:endParaRPr lang="en-US"/>
+          </a:p>
+        </p:txBody>
+      </p:sp>
+      <p:sp>
+        <p:nvSpPr>
+          <p:cNvPr id="17" name="Shape 15"/>
+          <p:cNvSpPr/>
+          <p:nvPr/>
+        </p:nvSpPr>
+        <p:spPr>
+          <a:xfrm>
+            <a:off x="4709160" y="2926080"/>
+            <a:ext cx="4160520" cy="64008"/>
+          </a:xfrm>
+          <a:prstGeom prst="rect">
+            <a:avLst/>
+          </a:prstGeom>
+          <a:solidFill>
+            <a:srgbClr val="0891B2"/>
+          </a:solidFill>
+          <a:ln w="12700">
+            <a:solidFill>
+              <a:srgbClr val="0891B2"/>
+            </a:solidFill>
+            <a:prstDash val="solid"/>
+          </a:ln>
+        </p:spPr>
+        <p:txBody>
+          <a:bodyPr/>
+          <a:lstStyle/>
+          <a:p>
+            <a:endParaRPr lang="en-US"/>
+          </a:p>
+        </p:txBody>
+      </p:sp>
+      <p:sp>
+        <p:nvSpPr>
+          <p:cNvPr id="18" name="Text 16"/>
+          <p:cNvSpPr/>
+          <p:nvPr/>
+        </p:nvSpPr>
+        <p:spPr>
+          <a:xfrm>
+            <a:off x="4892040" y="3063240"/>
+            <a:ext cx="3749040" cy="411480"/>
+          </a:xfrm>
+          <a:prstGeom prst="rect">
+            <a:avLst/>
+          </a:prstGeom>
+          <a:noFill/>
+        </p:spPr>
+        <p:txBody>
+          <a:bodyPr wrap="square" lIns="0" tIns="0" rIns="0" bIns="0" rtlCol="0" anchor="ctr"/>
+          <a:lstStyle/>
+          <a:p>
+            <a:pPr marL="0" indent="0">
+              <a:buNone/>
+            </a:pPr>
+            <a:r>
+              <a:rPr lang="en-US" sz="1400" b="1" dirty="0">
+                <a:solidFill>
+                  <a:srgbClr val="1E2761"/>
+                </a:solidFill>
+                <a:latin typeface="Calibri" pitchFamily="34" charset="0"/>
+                <a:ea typeface="Calibri" pitchFamily="34" charset="-122"/>
+                <a:cs typeface="Calibri" pitchFamily="34" charset="-120"/>
+              </a:rPr>
+              <a:t>Total Charges (0.074)</a:t>
+            </a:r>
+            <a:endParaRPr lang="en-US" sz="1400" dirty="0"/>
+          </a:p>
+        </p:txBody>
+      </p:sp>
+      <p:sp>
+        <p:nvSpPr>
+          <p:cNvPr id="19" name="Text 17"/>
+          <p:cNvSpPr/>
+          <p:nvPr/>
+        </p:nvSpPr>
+        <p:spPr>
+          <a:xfrm>
+            <a:off x="4892040" y="3520440"/>
+            <a:ext cx="3749040" cy="1051560"/>
+          </a:xfrm>
+          <a:prstGeom prst="rect">
+            <a:avLst/>
+          </a:prstGeom>
+          <a:noFill/>
+        </p:spPr>
+        <p:txBody>
+          <a:bodyPr wrap="square" lIns="0" tIns="0" rIns="0" bIns="0" rtlCol="0" anchor="t"/>
+          <a:lstStyle/>
+          <a:p>
+            <a:pPr marL="0" indent="0">
+              <a:buNone/>
+            </a:pPr>
+            <a:r>
+              <a:rPr lang="en-US" sz="1150" dirty="0">
+                <a:solidFill>
+                  <a:srgbClr val="1E2761"/>
+                </a:solidFill>
+                <a:latin typeface="Calibri" pitchFamily="34" charset="0"/>
+                <a:ea typeface="Calibri" pitchFamily="34" charset="-122"/>
+                <a:cs typeface="Calibri" pitchFamily="34" charset="-120"/>
+              </a:rPr>
+              <a:t>Aggregated charges capture cumulative billing pressure. The engineered total_charges feature confirms that high overall cost drives customer attrition.</a:t>
+            </a:r>
+            <a:endParaRPr lang="en-US" sz="1150" dirty="0"/>
+          </a:p>
+        </p:txBody>
+      </p:sp>
+    </p:spTree>
+  </p:cSld>
+  <p:clrMapOvr>
+    <a:masterClrMapping/>
+  </p:clrMapOvr>
+</p:sld>
+</file>
+
+<file path=ppt/slides/slide47.xml><?xml version="1.0" encoding="utf-8"?>
+<p:sld xmlns:a="http://schemas.openxmlformats.org/drawingml/2006/main" xmlns:r="http://schemas.openxmlformats.org/officeDocument/2006/relationships" xmlns:p="http://schemas.openxmlformats.org/presentationml/2006/main">
+  <p:cSld>
+    <p:bg>
+      <p:bgPr>
+        <a:solidFill>
+          <a:srgbClr val="FFFFFF"/>
+        </a:solidFill>
+        <a:effectLst/>
+      </p:bgPr>
+    </p:bg>
+    <p:spTree>
+      <p:nvGrpSpPr>
+        <p:cNvPr id="1" name=""/>
+        <p:cNvGrpSpPr/>
+        <p:nvPr/>
+      </p:nvGrpSpPr>
+      <p:grpSpPr>
+        <a:xfrm>
+          <a:off x="0" y="0"/>
+          <a:ext cx="0" cy="0"/>
+          <a:chOff x="0" y="0"/>
+          <a:chExt cx="0" cy="0"/>
+        </a:xfrm>
+      </p:grpSpPr>
+      <p:sp>
+        <p:nvSpPr>
+          <p:cNvPr id="2" name="Shape 0"/>
+          <p:cNvSpPr/>
+          <p:nvPr/>
+        </p:nvSpPr>
+        <p:spPr>
+          <a:xfrm>
+            <a:off x="0" y="0"/>
+            <a:ext cx="164592" cy="5143500"/>
+          </a:xfrm>
+          <a:prstGeom prst="rect">
+            <a:avLst/>
+          </a:prstGeom>
+          <a:solidFill>
+            <a:srgbClr val="0891B2"/>
+          </a:solidFill>
+          <a:ln>
+            <a:noFill/>
+          </a:ln>
+        </p:spPr>
+        <p:txBody>
+          <a:bodyPr/>
+          <a:lstStyle/>
+          <a:p>
+            <a:endParaRPr lang="en-US"/>
+          </a:p>
+        </p:txBody>
+      </p:sp>
+      <p:sp>
+        <p:nvSpPr>
+          <p:cNvPr id="3" name="Text 1"/>
+          <p:cNvSpPr/>
+          <p:nvPr/>
+        </p:nvSpPr>
+        <p:spPr>
+          <a:xfrm>
+            <a:off x="457200" y="457200"/>
+            <a:ext cx="8229600" cy="640080"/>
+          </a:xfrm>
+          <a:prstGeom prst="rect">
+            <a:avLst/>
+          </a:prstGeom>
+          <a:noFill/>
+        </p:spPr>
+        <p:txBody>
+          <a:bodyPr wrap="square" lIns="0" tIns="0" rIns="0" bIns="0" rtlCol="0" anchor="ctr"/>
+          <a:lstStyle/>
+          <a:p>
+            <a:pPr marL="0" indent="0" algn="ctr">
+              <a:buNone/>
+            </a:pPr>
+            <a:r>
+              <a:rPr lang="en-US" sz="3000" b="1" dirty="0">
+                <a:solidFill>
+                  <a:srgbClr val="002060"/>
+                </a:solidFill>
+                <a:latin typeface="Calibri" pitchFamily="34" charset="0"/>
+                <a:ea typeface="Calibri" pitchFamily="34" charset="-122"/>
+                <a:cs typeface="Calibri" pitchFamily="34" charset="-120"/>
+              </a:rPr>
+              <a:t>Random Forest: Key Takeaways</a:t>
+            </a:r>
+            <a:endParaRPr lang="en-US" sz="3000" b="1" dirty="0">
+              <a:solidFill>
+                <a:srgbClr val="002060"/>
+              </a:solidFill>
+              <a:latin typeface="Calibri" pitchFamily="34" charset="0"/>
+              <a:ea typeface="Calibri" pitchFamily="34" charset="-122"/>
+              <a:cs typeface="Calibri" pitchFamily="34" charset="-120"/>
+            </a:endParaRPr>
+          </a:p>
+        </p:txBody>
+      </p:sp>
+      <p:graphicFrame>
+        <p:nvGraphicFramePr>
+          <p:cNvPr id="7" name="Table 0"/>
+          <p:cNvGraphicFramePr>
+            <a:graphicFrameLocks noGrp="1"/>
+          </p:cNvGraphicFramePr>
+          <p:nvPr/>
+        </p:nvGraphicFramePr>
+        <p:xfrm>
+          <a:off x="1371600" y="1280160"/>
+          <a:ext cx="6400800" cy="2743200"/>
+        </p:xfrm>
+        <a:graphic>
+          <a:graphicData uri="http://schemas.openxmlformats.org/drawingml/2006/table">
+            <a:tbl>
+              <a:tblPr/>
+              <a:tblGrid>
+                <a:gridCol w="2286000"/>
+                <a:gridCol w="1828800"/>
+                <a:gridCol w="2286000"/>
+              </a:tblGrid>
+              <a:tr h="548640">
+                <a:tc>
+                  <a:txBody>
+                    <a:bodyPr/>
+                    <a:lstStyle/>
+                    <a:p>
+                      <a:pPr marL="0" indent="0" algn="ctr">
+                        <a:buNone/>
+                      </a:pPr>
+                      <a:r>
+                        <a:rPr lang="en-US" sz="1200" b="1" dirty="0">
+                          <a:solidFill>
+                            <a:srgbClr val="FFFFFF"/>
+                          </a:solidFill>
+                        </a:rPr>
+                        <a:t>Metric</a:t>
+                      </a:r>
+                      <a:endParaRPr lang="en-US" sz="1200" dirty="0"/>
+                    </a:p>
+                  </a:txBody>
+                  <a:tcPr anchor="ctr">
+                    <a:lnL w="0" cap="flat" cmpd="sng" algn="ctr">
+                      <a:noFill/>
+                    </a:lnL>
+                    <a:lnR w="0" cap="flat" cmpd="sng" algn="ctr">
+                      <a:noFill/>
+                    </a:lnR>
+                    <a:lnT w="0" cap="flat" cmpd="sng" algn="ctr">
+                      <a:noFill/>
+                    </a:lnT>
+                    <a:lnB w="0" cap="flat" cmpd="sng" algn="ctr">
+                      <a:noFill/>
+                    </a:lnB>
+                    <a:solidFill>
+                      <a:srgbClr val="0891B2"/>
+                    </a:solidFill>
+                  </a:tcPr>
+                </a:tc>
+                <a:tc>
+                  <a:txBody>
+                    <a:bodyPr/>
+                    <a:lstStyle/>
+                    <a:p>
+                      <a:pPr marL="0" indent="0" algn="ctr">
+                        <a:buNone/>
+                      </a:pPr>
+                      <a:r>
+                        <a:rPr lang="en-US" sz="1200" b="1" dirty="0">
+                          <a:solidFill>
+                            <a:srgbClr val="FFFFFF"/>
+                          </a:solidFill>
+                        </a:rPr>
+                        <a:t>Score</a:t>
+                      </a:r>
+                      <a:endParaRPr lang="en-US" sz="1200" dirty="0"/>
+                    </a:p>
+                  </a:txBody>
+                  <a:tcPr anchor="ctr">
+                    <a:lnL w="0" cap="flat" cmpd="sng" algn="ctr">
+                      <a:noFill/>
+                    </a:lnL>
+                    <a:lnR w="0" cap="flat" cmpd="sng" algn="ctr">
+                      <a:noFill/>
+                    </a:lnR>
+                    <a:lnT w="0" cap="flat" cmpd="sng" algn="ctr">
+                      <a:noFill/>
+                    </a:lnT>
+                    <a:lnB w="0" cap="flat" cmpd="sng" algn="ctr">
+                      <a:noFill/>
+                    </a:lnB>
+                    <a:solidFill>
+                      <a:srgbClr val="0891B2"/>
+                    </a:solidFill>
+                  </a:tcPr>
+                </a:tc>
+                <a:tc>
+                  <a:txBody>
+                    <a:bodyPr/>
+                    <a:lstStyle/>
+                    <a:p>
+                      <a:pPr marL="0" indent="0" algn="ctr">
+                        <a:buNone/>
+                      </a:pPr>
+                      <a:r>
+                        <a:rPr lang="en-US" sz="1200" b="1" dirty="0">
+                          <a:solidFill>
+                            <a:srgbClr val="FFFFFF"/>
+                          </a:solidFill>
+                        </a:rPr>
+                        <a:t>Benchmark</a:t>
+                      </a:r>
+                      <a:endParaRPr lang="en-US" sz="1200" dirty="0"/>
+                    </a:p>
+                  </a:txBody>
+                  <a:tcPr anchor="ctr">
+                    <a:lnL w="0" cap="flat" cmpd="sng" algn="ctr">
+                      <a:noFill/>
+                    </a:lnL>
+                    <a:lnR w="0" cap="flat" cmpd="sng" algn="ctr">
+                      <a:noFill/>
+                    </a:lnR>
+                    <a:lnT w="0" cap="flat" cmpd="sng" algn="ctr">
+                      <a:noFill/>
+                    </a:lnT>
+                    <a:lnB w="0" cap="flat" cmpd="sng" algn="ctr">
+                      <a:noFill/>
+                    </a:lnB>
+                    <a:solidFill>
+                      <a:srgbClr val="0891B2"/>
+                    </a:solidFill>
+                  </a:tcPr>
+                </a:tc>
+              </a:tr>
+              <a:tr h="548640">
+                <a:tc>
+                  <a:txBody>
+                    <a:bodyPr/>
+                    <a:lstStyle/>
+                    <a:p>
+                      <a:pPr marL="0" indent="0" algn="ctr">
+                        <a:buNone/>
+                      </a:pPr>
+                      <a:r>
+                        <a:rPr lang="en-US" sz="1300" dirty="0">
+                          <a:solidFill>
+                            <a:srgbClr val="FFFFFF"/>
+                          </a:solidFill>
+                        </a:rPr>
+                        <a:t>Accuracy</a:t>
+                      </a:r>
+                      <a:endParaRPr lang="en-US" sz="1300" dirty="0"/>
+                    </a:p>
+                  </a:txBody>
+                  <a:tcPr anchor="ctr">
+                    <a:lnL w="0" cap="flat" cmpd="sng" algn="ctr">
+                      <a:noFill/>
+                    </a:lnL>
+                    <a:lnR w="0" cap="flat" cmpd="sng" algn="ctr">
+                      <a:noFill/>
+                    </a:lnR>
+                    <a:lnT w="0" cap="flat" cmpd="sng" algn="ctr">
+                      <a:noFill/>
+                    </a:lnT>
+                    <a:lnB w="0" cap="flat" cmpd="sng" algn="ctr">
+                      <a:noFill/>
+                    </a:lnB>
+                    <a:solidFill>
+                      <a:srgbClr val="1E2761"/>
+                    </a:solidFill>
+                  </a:tcPr>
+                </a:tc>
+                <a:tc>
+                  <a:txBody>
+                    <a:bodyPr/>
+                    <a:lstStyle/>
+                    <a:p>
+                      <a:pPr marL="0" indent="0" algn="ctr">
+                        <a:buNone/>
+                      </a:pPr>
+                      <a:r>
+                        <a:rPr lang="en-US" sz="1300" b="1" dirty="0">
+                          <a:solidFill>
+                            <a:schemeClr val="bg1"/>
+                          </a:solidFill>
+                        </a:rPr>
+                        <a:t>93.1%</a:t>
+                      </a:r>
+                      <a:endParaRPr lang="en-US" sz="1300" b="1" dirty="0">
+                        <a:solidFill>
+                          <a:schemeClr val="bg1"/>
+                        </a:solidFill>
+                      </a:endParaRPr>
+                    </a:p>
+                  </a:txBody>
+                  <a:tcPr anchor="ctr">
+                    <a:lnL w="0" cap="flat" cmpd="sng" algn="ctr">
+                      <a:noFill/>
+                    </a:lnL>
+                    <a:lnR w="0" cap="flat" cmpd="sng" algn="ctr">
+                      <a:noFill/>
+                    </a:lnR>
+                    <a:lnT w="0" cap="flat" cmpd="sng" algn="ctr">
+                      <a:noFill/>
+                    </a:lnT>
+                    <a:lnB w="0" cap="flat" cmpd="sng" algn="ctr">
+                      <a:noFill/>
+                    </a:lnB>
+                    <a:solidFill>
+                      <a:srgbClr val="1E2761"/>
+                    </a:solidFill>
+                  </a:tcPr>
+                </a:tc>
+                <a:tc>
+                  <a:txBody>
+                    <a:bodyPr/>
+                    <a:lstStyle/>
+                    <a:p>
+                      <a:pPr marL="0" indent="0" algn="ctr">
+                        <a:buNone/>
+                      </a:pPr>
+                      <a:r>
+                        <a:rPr lang="en-US" sz="1300" dirty="0">
+                          <a:solidFill>
+                            <a:srgbClr val="86EFAC"/>
+                          </a:solidFill>
+                        </a:rPr>
+                        <a:t>Strong baseline</a:t>
+                      </a:r>
+                      <a:endParaRPr lang="en-US" sz="1300" dirty="0"/>
+                    </a:p>
+                  </a:txBody>
+                  <a:tcPr anchor="ctr">
+                    <a:lnL w="0" cap="flat" cmpd="sng" algn="ctr">
+                      <a:noFill/>
+                    </a:lnL>
+                    <a:lnR w="0" cap="flat" cmpd="sng" algn="ctr">
+                      <a:noFill/>
+                    </a:lnR>
+                    <a:lnT w="0" cap="flat" cmpd="sng" algn="ctr">
+                      <a:noFill/>
+                    </a:lnT>
+                    <a:lnB w="0" cap="flat" cmpd="sng" algn="ctr">
+                      <a:noFill/>
+                    </a:lnB>
+                    <a:solidFill>
+                      <a:srgbClr val="1E2761"/>
+                    </a:solidFill>
+                  </a:tcPr>
+                </a:tc>
+              </a:tr>
+              <a:tr h="548640">
+                <a:tc>
+                  <a:txBody>
+                    <a:bodyPr/>
+                    <a:lstStyle/>
+                    <a:p>
+                      <a:pPr marL="0" indent="0" algn="ctr">
+                        <a:buNone/>
+                      </a:pPr>
+                      <a:r>
+                        <a:rPr lang="en-US" sz="1300" dirty="0">
+                          <a:solidFill>
+                            <a:srgbClr val="FFFFFF"/>
+                          </a:solidFill>
+                        </a:rPr>
+                        <a:t>Churn Recall</a:t>
+                      </a:r>
+                      <a:endParaRPr lang="en-US" sz="1300" dirty="0"/>
+                    </a:p>
+                  </a:txBody>
+                  <a:tcPr anchor="ctr">
+                    <a:lnL w="0" cap="flat" cmpd="sng" algn="ctr">
+                      <a:noFill/>
+                    </a:lnL>
+                    <a:lnR w="0" cap="flat" cmpd="sng" algn="ctr">
+                      <a:noFill/>
+                    </a:lnR>
+                    <a:lnT w="0" cap="flat" cmpd="sng" algn="ctr">
+                      <a:noFill/>
+                    </a:lnT>
+                    <a:lnB w="0" cap="flat" cmpd="sng" algn="ctr">
+                      <a:noFill/>
+                    </a:lnB>
+                    <a:solidFill>
+                      <a:srgbClr val="243B55"/>
+                    </a:solidFill>
+                  </a:tcPr>
+                </a:tc>
+                <a:tc>
+                  <a:txBody>
+                    <a:bodyPr/>
+                    <a:lstStyle/>
+                    <a:p>
+                      <a:pPr marL="0" indent="0" algn="ctr">
+                        <a:buNone/>
+                      </a:pPr>
+                      <a:r>
+                        <a:rPr lang="en-US" sz="1300" b="1" dirty="0">
+                          <a:solidFill>
+                            <a:schemeClr val="bg1"/>
+                          </a:solidFill>
+                        </a:rPr>
+                        <a:t>72%</a:t>
+                      </a:r>
+                      <a:endParaRPr lang="en-US" sz="1300" b="1" dirty="0">
+                        <a:solidFill>
+                          <a:schemeClr val="bg1"/>
+                        </a:solidFill>
+                      </a:endParaRPr>
+                    </a:p>
+                  </a:txBody>
+                  <a:tcPr anchor="ctr">
+                    <a:lnL w="0" cap="flat" cmpd="sng" algn="ctr">
+                      <a:noFill/>
+                    </a:lnL>
+                    <a:lnR w="0" cap="flat" cmpd="sng" algn="ctr">
+                      <a:noFill/>
+                    </a:lnR>
+                    <a:lnT w="0" cap="flat" cmpd="sng" algn="ctr">
+                      <a:noFill/>
+                    </a:lnT>
+                    <a:lnB w="0" cap="flat" cmpd="sng" algn="ctr">
+                      <a:noFill/>
+                    </a:lnB>
+                    <a:solidFill>
+                      <a:srgbClr val="243B55"/>
+                    </a:solidFill>
+                  </a:tcPr>
+                </a:tc>
+                <a:tc>
+                  <a:txBody>
+                    <a:bodyPr/>
+                    <a:lstStyle/>
+                    <a:p>
+                      <a:pPr marL="0" indent="0" algn="ctr">
+                        <a:buNone/>
+                      </a:pPr>
+                      <a:r>
+                        <a:rPr lang="en-US" sz="1300" dirty="0">
+                          <a:solidFill>
+                            <a:srgbClr val="86EFAC"/>
+                          </a:solidFill>
+                        </a:rPr>
+                        <a:t>Good churn detection</a:t>
+                      </a:r>
+                      <a:endParaRPr lang="en-US" sz="1300" dirty="0"/>
+                    </a:p>
+                  </a:txBody>
+                  <a:tcPr anchor="ctr">
+                    <a:lnL w="0" cap="flat" cmpd="sng" algn="ctr">
+                      <a:noFill/>
+                    </a:lnL>
+                    <a:lnR w="0" cap="flat" cmpd="sng" algn="ctr">
+                      <a:noFill/>
+                    </a:lnR>
+                    <a:lnT w="0" cap="flat" cmpd="sng" algn="ctr">
+                      <a:noFill/>
+                    </a:lnT>
+                    <a:lnB w="0" cap="flat" cmpd="sng" algn="ctr">
+                      <a:noFill/>
+                    </a:lnB>
+                    <a:solidFill>
+                      <a:srgbClr val="243B55"/>
+                    </a:solidFill>
+                  </a:tcPr>
+                </a:tc>
+              </a:tr>
+              <a:tr h="548640">
+                <a:tc>
+                  <a:txBody>
+                    <a:bodyPr/>
+                    <a:lstStyle/>
+                    <a:p>
+                      <a:pPr marL="0" indent="0" algn="ctr">
+                        <a:buNone/>
+                      </a:pPr>
+                      <a:r>
+                        <a:rPr lang="en-US" sz="1300" dirty="0">
+                          <a:solidFill>
+                            <a:srgbClr val="FFFFFF"/>
+                          </a:solidFill>
+                        </a:rPr>
+                        <a:t>Churn Precision</a:t>
+                      </a:r>
+                      <a:endParaRPr lang="en-US" sz="1300" dirty="0"/>
+                    </a:p>
+                  </a:txBody>
+                  <a:tcPr anchor="ctr">
+                    <a:lnL w="0" cap="flat" cmpd="sng" algn="ctr">
+                      <a:noFill/>
+                    </a:lnL>
+                    <a:lnR w="0" cap="flat" cmpd="sng" algn="ctr">
+                      <a:noFill/>
+                    </a:lnR>
+                    <a:lnT w="0" cap="flat" cmpd="sng" algn="ctr">
+                      <a:noFill/>
+                    </a:lnT>
+                    <a:lnB w="0" cap="flat" cmpd="sng" algn="ctr">
+                      <a:noFill/>
+                    </a:lnB>
+                    <a:solidFill>
+                      <a:srgbClr val="1E2761"/>
+                    </a:solidFill>
+                  </a:tcPr>
+                </a:tc>
+                <a:tc>
+                  <a:txBody>
+                    <a:bodyPr/>
+                    <a:lstStyle/>
+                    <a:p>
+                      <a:pPr marL="0" indent="0" algn="ctr">
+                        <a:buNone/>
+                      </a:pPr>
+                      <a:r>
+                        <a:rPr lang="en-US" sz="1300" b="1" dirty="0">
+                          <a:solidFill>
+                            <a:schemeClr val="bg1"/>
+                          </a:solidFill>
+                        </a:rPr>
+                        <a:t>68%</a:t>
+                      </a:r>
+                      <a:endParaRPr lang="en-US" sz="1300" b="1" dirty="0">
+                        <a:solidFill>
+                          <a:schemeClr val="bg1"/>
+                        </a:solidFill>
+                      </a:endParaRPr>
+                    </a:p>
+                  </a:txBody>
+                  <a:tcPr anchor="ctr">
+                    <a:lnL w="0" cap="flat" cmpd="sng" algn="ctr">
+                      <a:noFill/>
+                    </a:lnL>
+                    <a:lnR w="0" cap="flat" cmpd="sng" algn="ctr">
+                      <a:noFill/>
+                    </a:lnR>
+                    <a:lnT w="0" cap="flat" cmpd="sng" algn="ctr">
+                      <a:noFill/>
+                    </a:lnT>
+                    <a:lnB w="0" cap="flat" cmpd="sng" algn="ctr">
+                      <a:noFill/>
+                    </a:lnB>
+                    <a:solidFill>
+                      <a:srgbClr val="1E2761"/>
+                    </a:solidFill>
+                  </a:tcPr>
+                </a:tc>
+                <a:tc>
+                  <a:txBody>
+                    <a:bodyPr/>
+                    <a:lstStyle/>
+                    <a:p>
+                      <a:pPr marL="0" indent="0" algn="ctr">
+                        <a:buNone/>
+                      </a:pPr>
+                      <a:r>
+                        <a:rPr lang="en-US" sz="1300" dirty="0">
+                          <a:solidFill>
+                            <a:srgbClr val="86EFAC"/>
+                          </a:solidFill>
+                        </a:rPr>
+                        <a:t>Moderate precision</a:t>
+                      </a:r>
+                      <a:endParaRPr lang="en-US" sz="1300" dirty="0"/>
+                    </a:p>
+                  </a:txBody>
+                  <a:tcPr anchor="ctr">
+                    <a:lnL w="0" cap="flat" cmpd="sng" algn="ctr">
+                      <a:noFill/>
+                    </a:lnL>
+                    <a:lnR w="0" cap="flat" cmpd="sng" algn="ctr">
+                      <a:noFill/>
+                    </a:lnR>
+                    <a:lnT w="0" cap="flat" cmpd="sng" algn="ctr">
+                      <a:noFill/>
+                    </a:lnT>
+                    <a:lnB w="0" cap="flat" cmpd="sng" algn="ctr">
+                      <a:noFill/>
+                    </a:lnB>
+                    <a:solidFill>
+                      <a:srgbClr val="1E2761"/>
+                    </a:solidFill>
+                  </a:tcPr>
+                </a:tc>
+              </a:tr>
+              <a:tr h="548640">
+                <a:tc>
+                  <a:txBody>
+                    <a:bodyPr/>
+                    <a:lstStyle/>
+                    <a:p>
+                      <a:pPr marL="0" indent="0" algn="ctr">
+                        <a:buNone/>
+                      </a:pPr>
+                      <a:r>
+                        <a:rPr lang="en-US" sz="1300" dirty="0">
+                          <a:solidFill>
+                            <a:srgbClr val="FFFFFF"/>
+                          </a:solidFill>
+                        </a:rPr>
+                        <a:t>F1 Score</a:t>
+                      </a:r>
+                      <a:endParaRPr lang="en-US" sz="1300" dirty="0"/>
+                    </a:p>
+                  </a:txBody>
+                  <a:tcPr anchor="ctr">
+                    <a:lnL w="0" cap="flat" cmpd="sng" algn="ctr">
+                      <a:noFill/>
+                    </a:lnL>
+                    <a:lnR w="0" cap="flat" cmpd="sng" algn="ctr">
+                      <a:noFill/>
+                    </a:lnR>
+                    <a:lnT w="0" cap="flat" cmpd="sng" algn="ctr">
+                      <a:noFill/>
+                    </a:lnT>
+                    <a:lnB w="0" cap="flat" cmpd="sng" algn="ctr">
+                      <a:noFill/>
+                    </a:lnB>
+                    <a:solidFill>
+                      <a:srgbClr val="243B55"/>
+                    </a:solidFill>
+                  </a:tcPr>
+                </a:tc>
+                <a:tc>
+                  <a:txBody>
+                    <a:bodyPr/>
+                    <a:lstStyle/>
+                    <a:p>
+                      <a:pPr marL="0" indent="0" algn="ctr">
+                        <a:buNone/>
+                      </a:pPr>
+                      <a:r>
+                        <a:rPr lang="en-US" sz="1300" b="1" dirty="0">
+                          <a:solidFill>
+                            <a:schemeClr val="bg1"/>
+                          </a:solidFill>
+                        </a:rPr>
+                        <a:t>0.69</a:t>
+                      </a:r>
+                      <a:endParaRPr lang="en-US" sz="1300" b="1" dirty="0">
+                        <a:solidFill>
+                          <a:schemeClr val="bg1"/>
+                        </a:solidFill>
+                      </a:endParaRPr>
+                    </a:p>
+                  </a:txBody>
+                  <a:tcPr anchor="ctr">
+                    <a:lnL w="0" cap="flat" cmpd="sng" algn="ctr">
+                      <a:noFill/>
+                    </a:lnL>
+                    <a:lnR w="0" cap="flat" cmpd="sng" algn="ctr">
+                      <a:noFill/>
+                    </a:lnR>
+                    <a:lnT w="0" cap="flat" cmpd="sng" algn="ctr">
+                      <a:noFill/>
+                    </a:lnT>
+                    <a:lnB w="0" cap="flat" cmpd="sng" algn="ctr">
+                      <a:noFill/>
+                    </a:lnB>
+                    <a:solidFill>
+                      <a:srgbClr val="243B55"/>
+                    </a:solidFill>
+                  </a:tcPr>
+                </a:tc>
+                <a:tc>
+                  <a:txBody>
+                    <a:bodyPr/>
+                    <a:lstStyle/>
+                    <a:p>
+                      <a:pPr marL="0" indent="0" algn="ctr">
+                        <a:buNone/>
+                      </a:pPr>
+                      <a:r>
+                        <a:rPr lang="en-US" sz="1300" dirty="0">
+                          <a:solidFill>
+                            <a:srgbClr val="86EFAC"/>
+                          </a:solidFill>
+                        </a:rPr>
+                        <a:t>Balanced recall-precision</a:t>
+                      </a:r>
+                      <a:endParaRPr lang="en-US" sz="1300" dirty="0"/>
+                    </a:p>
+                  </a:txBody>
+                  <a:tcPr anchor="ctr">
+                    <a:lnL w="0" cap="flat" cmpd="sng" algn="ctr">
+                      <a:noFill/>
+                    </a:lnL>
+                    <a:lnR w="0" cap="flat" cmpd="sng" algn="ctr">
+                      <a:noFill/>
+                    </a:lnR>
+                    <a:lnT w="0" cap="flat" cmpd="sng" algn="ctr">
+                      <a:noFill/>
+                    </a:lnT>
+                    <a:lnB w="0" cap="flat" cmpd="sng" algn="ctr">
+                      <a:noFill/>
+                    </a:lnB>
+                    <a:solidFill>
+                      <a:srgbClr val="243B55"/>
+                    </a:solidFill>
+                  </a:tcPr>
+                </a:tc>
+              </a:tr>
+            </a:tbl>
+          </a:graphicData>
+        </a:graphic>
+      </p:graphicFrame>
+      <p:sp>
+        <p:nvSpPr>
+          <p:cNvPr id="5" name="Text 2"/>
+          <p:cNvSpPr/>
+          <p:nvPr/>
+        </p:nvSpPr>
+        <p:spPr>
+          <a:xfrm>
+            <a:off x="457200" y="4343400"/>
+            <a:ext cx="8229600" cy="457200"/>
+          </a:xfrm>
+          <a:prstGeom prst="rect">
+            <a:avLst/>
+          </a:prstGeom>
+          <a:solidFill>
+            <a:srgbClr val="1E2761"/>
+          </a:solidFill>
+          <a:ln>
+            <a:noFill/>
+          </a:ln>
+        </p:spPr>
+        <p:txBody>
+          <a:bodyPr wrap="square" lIns="0" tIns="0" rIns="0" bIns="0" rtlCol="0" anchor="ctr"/>
+          <a:lstStyle/>
+          <a:p>
+            <a:pPr marL="0" indent="0" algn="ctr">
+              <a:buNone/>
+            </a:pPr>
+            <a:r>
+              <a:rPr lang="en-US" sz="1300" b="1" i="1" dirty="0">
+                <a:solidFill>
+                  <a:srgbClr val="FFFFFF"/>
+                </a:solidFill>
+                <a:latin typeface="Calibri" pitchFamily="34" charset="0"/>
+                <a:ea typeface="Calibri" pitchFamily="34" charset="-122"/>
+                <a:cs typeface="Calibri" pitchFamily="34" charset="-120"/>
+              </a:rPr>
+              <a:t>A robust, interpretable ensemble model with strong feature importance for understanding churn drivers.</a:t>
+            </a:r>
+            <a:endParaRPr lang="en-US" sz="1300" dirty="0"/>
+          </a:p>
+        </p:txBody>
+      </p:sp>
+    </p:spTree>
+  </p:cSld>
+  <p:clrMapOvr>
+    <a:masterClrMapping/>
+  </p:clrMapOvr>
+</p:sld>
+</file>
+
 <file path=ppt/slides/slide5.xml><?xml version="1.0" encoding="utf-8"?>
 <p:sld xmlns:a="http://schemas.openxmlformats.org/drawingml/2006/main" xmlns:r="http://schemas.openxmlformats.org/officeDocument/2006/relationships" xmlns:p="http://schemas.openxmlformats.org/presentationml/2006/main">
   <p:cSld>
